--- a/20261013_展示会LINE運用方針_予算枠のご提案.pptx
+++ b/20261013_展示会LINE運用方針_予算枠のご提案.pptx
@@ -4870,7 +4870,7 @@
                 <a:ea typeface="メイリオ"/>
                 <a:cs typeface="メイリオ"/>
               </a:rPr>
-              <a:t>進め方｜2か月試して、続けるかを決める</a:t>
+              <a:t>運用｜毎月の数字を見て、予約の取れるエリアに寄せる</a:t>
             </a:r>
           </a:p>
         </p:txBody>
@@ -4911,7 +4911,7 @@
                 <a:ea typeface="メイリオ"/>
                 <a:cs typeface="メイリオ"/>
               </a:rPr>
-              <a:t>判断の基準を先に決め、効果が見えた分だけ広げる</a:t>
+              <a:t>エリア・訴求ごとの予約数を見て、予約1件あたりの広告費を下げていく</a:t>
             </a:r>
             <a:endParaRPr sz="1000" dirty="0">
               <a:solidFill>
@@ -5042,7 +5042,7 @@
                 <a:ea typeface="メイリオ"/>
                 <a:cs typeface="メイリオ"/>
               </a:rPr>
-              <a:t>流れ</a:t>
+              <a:t>毎月の流れ</a:t>
             </a:r>
           </a:p>
         </p:txBody>
@@ -5106,9 +5106,88 @@
                 <a:ea typeface="メイリオ"/>
                 <a:cs typeface="メイリオ"/>
               </a:rPr>
-              <a:t>1〜2か月目</a:t>
-            </a:r>
-          </a:p>
+              <a:t>LINE広告を配信</a:t>
+            </a:r>
+          </a:p>
+        </p:txBody>
+      </p:sp>
+      <p:cxnSp>
+        <p:nvCxnSpPr>
+          <p:cNvPr id="9" name="Connector 8"/>
+          <p:cNvCxnSpPr/>
+          <p:nvPr/>
+        </p:nvCxnSpPr>
+        <p:spPr>
+          <a:xfrm>
+            <a:off x="2770199" y="2249999"/>
+            <a:ext cx="144000" cy="0"/>
+          </a:xfrm>
+          <a:prstGeom prst="line">
+            <a:avLst/>
+          </a:prstGeom>
+          <a:ln w="19050">
+            <a:solidFill>
+              <a:srgbClr val="1F285A"/>
+            </a:solidFill>
+            <a:tailEnd type="triangle" w="med" len="med"/>
+          </a:ln>
+        </p:spPr>
+        <p:style>
+          <a:lnRef idx="2">
+            <a:schemeClr val="accent1"/>
+          </a:lnRef>
+          <a:fillRef idx="0">
+            <a:schemeClr val="accent1"/>
+          </a:fillRef>
+          <a:effectRef idx="0">
+            <a:schemeClr val="accent1"/>
+          </a:effectRef>
+          <a:fontRef idx="minor">
+            <a:schemeClr val="tx1"/>
+          </a:fontRef>
+        </p:style>
+      </p:cxnSp>
+      <p:sp>
+        <p:nvSpPr>
+          <p:cNvPr id="10" name="Rectangle 9"/>
+          <p:cNvSpPr/>
+          <p:nvPr/>
+        </p:nvSpPr>
+        <p:spPr>
+          <a:xfrm>
+            <a:off x="2950199" y="1961999"/>
+            <a:ext cx="1963799" cy="576000"/>
+          </a:xfrm>
+          <a:prstGeom prst="rect">
+            <a:avLst/>
+          </a:prstGeom>
+          <a:solidFill>
+            <a:srgbClr val="FFFFFF"/>
+          </a:solidFill>
+          <a:ln w="12700">
+            <a:solidFill>
+              <a:srgbClr val="1F285A"/>
+            </a:solidFill>
+          </a:ln>
+          <a:effectLst/>
+        </p:spPr>
+        <p:style>
+          <a:lnRef idx="1">
+            <a:schemeClr val="accent1"/>
+          </a:lnRef>
+          <a:fillRef idx="3">
+            <a:schemeClr val="accent1"/>
+          </a:fillRef>
+          <a:effectRef idx="0">
+            <a:schemeClr val="accent1"/>
+          </a:effectRef>
+          <a:fontRef idx="minor">
+            <a:schemeClr val="lt1"/>
+          </a:fontRef>
+        </p:style>
+        <p:txBody>
+          <a:bodyPr rtlCol="0" anchor="ctr" wrap="square" lIns="36000" tIns="18000" rIns="36000" bIns="18000"/>
+          <a:lstStyle/>
           <a:p>
             <a:pPr algn="ctr">
               <a:lnSpc>
@@ -5127,88 +5206,9 @@
                 <a:ea typeface="メイリオ"/>
                 <a:cs typeface="メイリオ"/>
               </a:rPr>
-              <a:t>LINE広告を配信</a:t>
-            </a:r>
-          </a:p>
-        </p:txBody>
-      </p:sp>
-      <p:cxnSp>
-        <p:nvCxnSpPr>
-          <p:cNvPr id="9" name="Connector 8"/>
-          <p:cNvCxnSpPr/>
-          <p:nvPr/>
-        </p:nvCxnSpPr>
-        <p:spPr>
-          <a:xfrm>
-            <a:off x="2770199" y="2249999"/>
-            <a:ext cx="144000" cy="0"/>
-          </a:xfrm>
-          <a:prstGeom prst="line">
-            <a:avLst/>
-          </a:prstGeom>
-          <a:ln w="19050">
-            <a:solidFill>
-              <a:srgbClr val="1F285A"/>
-            </a:solidFill>
-            <a:tailEnd type="triangle" w="med" len="med"/>
-          </a:ln>
-        </p:spPr>
-        <p:style>
-          <a:lnRef idx="2">
-            <a:schemeClr val="accent1"/>
-          </a:lnRef>
-          <a:fillRef idx="0">
-            <a:schemeClr val="accent1"/>
-          </a:fillRef>
-          <a:effectRef idx="0">
-            <a:schemeClr val="accent1"/>
-          </a:effectRef>
-          <a:fontRef idx="minor">
-            <a:schemeClr val="tx1"/>
-          </a:fontRef>
-        </p:style>
-      </p:cxnSp>
-      <p:sp>
-        <p:nvSpPr>
-          <p:cNvPr id="10" name="Rectangle 9"/>
-          <p:cNvSpPr/>
-          <p:nvPr/>
-        </p:nvSpPr>
-        <p:spPr>
-          <a:xfrm>
-            <a:off x="2950199" y="1961999"/>
-            <a:ext cx="1963799" cy="576000"/>
-          </a:xfrm>
-          <a:prstGeom prst="rect">
-            <a:avLst/>
-          </a:prstGeom>
-          <a:solidFill>
-            <a:srgbClr val="FFFFFF"/>
-          </a:solidFill>
-          <a:ln w="12700">
-            <a:solidFill>
-              <a:srgbClr val="1F285A"/>
-            </a:solidFill>
-          </a:ln>
-          <a:effectLst/>
-        </p:spPr>
-        <p:style>
-          <a:lnRef idx="1">
-            <a:schemeClr val="accent1"/>
-          </a:lnRef>
-          <a:fillRef idx="3">
-            <a:schemeClr val="accent1"/>
-          </a:fillRef>
-          <a:effectRef idx="0">
-            <a:schemeClr val="accent1"/>
-          </a:effectRef>
-          <a:fontRef idx="minor">
-            <a:schemeClr val="lt1"/>
-          </a:fontRef>
-        </p:style>
-        <p:txBody>
-          <a:bodyPr rtlCol="0" anchor="ctr" wrap="square" lIns="36000" tIns="18000" rIns="36000" bIns="18000"/>
-          <a:lstStyle/>
+              <a:t>エリア・訴求ごとの</a:t>
+            </a:r>
+          </a:p>
           <a:p>
             <a:pPr algn="ctr">
               <a:lnSpc>
@@ -5227,9 +5227,88 @@
                 <a:ea typeface="メイリオ"/>
                 <a:cs typeface="メイリオ"/>
               </a:rPr>
-              <a:t>予約1件あたりの</a:t>
-            </a:r>
-          </a:p>
+              <a:t>予約数を確認</a:t>
+            </a:r>
+          </a:p>
+        </p:txBody>
+      </p:sp>
+      <p:cxnSp>
+        <p:nvCxnSpPr>
+          <p:cNvPr id="11" name="Connector 10"/>
+          <p:cNvCxnSpPr/>
+          <p:nvPr/>
+        </p:nvCxnSpPr>
+        <p:spPr>
+          <a:xfrm>
+            <a:off x="4949999" y="2249999"/>
+            <a:ext cx="144000" cy="0"/>
+          </a:xfrm>
+          <a:prstGeom prst="line">
+            <a:avLst/>
+          </a:prstGeom>
+          <a:ln w="19050">
+            <a:solidFill>
+              <a:srgbClr val="1F285A"/>
+            </a:solidFill>
+            <a:tailEnd type="triangle" w="med" len="med"/>
+          </a:ln>
+        </p:spPr>
+        <p:style>
+          <a:lnRef idx="2">
+            <a:schemeClr val="accent1"/>
+          </a:lnRef>
+          <a:fillRef idx="0">
+            <a:schemeClr val="accent1"/>
+          </a:fillRef>
+          <a:effectRef idx="0">
+            <a:schemeClr val="accent1"/>
+          </a:effectRef>
+          <a:fontRef idx="minor">
+            <a:schemeClr val="tx1"/>
+          </a:fontRef>
+        </p:style>
+      </p:cxnSp>
+      <p:sp>
+        <p:nvSpPr>
+          <p:cNvPr id="12" name="Rectangle 11"/>
+          <p:cNvSpPr/>
+          <p:nvPr/>
+        </p:nvSpPr>
+        <p:spPr>
+          <a:xfrm>
+            <a:off x="5129999" y="1961999"/>
+            <a:ext cx="1963799" cy="576000"/>
+          </a:xfrm>
+          <a:prstGeom prst="rect">
+            <a:avLst/>
+          </a:prstGeom>
+          <a:solidFill>
+            <a:srgbClr val="FFFFFF"/>
+          </a:solidFill>
+          <a:ln w="12700">
+            <a:solidFill>
+              <a:srgbClr val="1F285A"/>
+            </a:solidFill>
+          </a:ln>
+          <a:effectLst/>
+        </p:spPr>
+        <p:style>
+          <a:lnRef idx="1">
+            <a:schemeClr val="accent1"/>
+          </a:lnRef>
+          <a:fillRef idx="3">
+            <a:schemeClr val="accent1"/>
+          </a:fillRef>
+          <a:effectRef idx="0">
+            <a:schemeClr val="accent1"/>
+          </a:effectRef>
+          <a:fontRef idx="minor">
+            <a:schemeClr val="lt1"/>
+          </a:fontRef>
+        </p:style>
+        <p:txBody>
+          <a:bodyPr rtlCol="0" anchor="ctr" wrap="square" lIns="36000" tIns="18000" rIns="36000" bIns="18000"/>
+          <a:lstStyle/>
           <a:p>
             <a:pPr algn="ctr">
               <a:lnSpc>
@@ -5248,88 +5327,9 @@
                 <a:ea typeface="メイリオ"/>
                 <a:cs typeface="メイリオ"/>
               </a:rPr>
-              <a:t>広告費を確認</a:t>
-            </a:r>
-          </a:p>
-        </p:txBody>
-      </p:sp>
-      <p:cxnSp>
-        <p:nvCxnSpPr>
-          <p:cNvPr id="11" name="Connector 10"/>
-          <p:cNvCxnSpPr/>
-          <p:nvPr/>
-        </p:nvCxnSpPr>
-        <p:spPr>
-          <a:xfrm>
-            <a:off x="4949999" y="2249999"/>
-            <a:ext cx="144000" cy="0"/>
-          </a:xfrm>
-          <a:prstGeom prst="line">
-            <a:avLst/>
-          </a:prstGeom>
-          <a:ln w="19050">
-            <a:solidFill>
-              <a:srgbClr val="1F285A"/>
-            </a:solidFill>
-            <a:tailEnd type="triangle" w="med" len="med"/>
-          </a:ln>
-        </p:spPr>
-        <p:style>
-          <a:lnRef idx="2">
-            <a:schemeClr val="accent1"/>
-          </a:lnRef>
-          <a:fillRef idx="0">
-            <a:schemeClr val="accent1"/>
-          </a:fillRef>
-          <a:effectRef idx="0">
-            <a:schemeClr val="accent1"/>
-          </a:effectRef>
-          <a:fontRef idx="minor">
-            <a:schemeClr val="tx1"/>
-          </a:fontRef>
-        </p:style>
-      </p:cxnSp>
-      <p:sp>
-        <p:nvSpPr>
-          <p:cNvPr id="12" name="Rectangle 11"/>
-          <p:cNvSpPr/>
-          <p:nvPr/>
-        </p:nvSpPr>
-        <p:spPr>
-          <a:xfrm>
-            <a:off x="5129999" y="1961999"/>
-            <a:ext cx="1963799" cy="576000"/>
-          </a:xfrm>
-          <a:prstGeom prst="rect">
-            <a:avLst/>
-          </a:prstGeom>
-          <a:solidFill>
-            <a:srgbClr val="FFFFFF"/>
-          </a:solidFill>
-          <a:ln w="12700">
-            <a:solidFill>
-              <a:srgbClr val="1F285A"/>
-            </a:solidFill>
-          </a:ln>
-          <a:effectLst/>
-        </p:spPr>
-        <p:style>
-          <a:lnRef idx="1">
-            <a:schemeClr val="accent1"/>
-          </a:lnRef>
-          <a:fillRef idx="3">
-            <a:schemeClr val="accent1"/>
-          </a:fillRef>
-          <a:effectRef idx="0">
-            <a:schemeClr val="accent1"/>
-          </a:effectRef>
-          <a:fontRef idx="minor">
-            <a:schemeClr val="lt1"/>
-          </a:fontRef>
-        </p:style>
-        <p:txBody>
-          <a:bodyPr rtlCol="0" anchor="ctr" wrap="square" lIns="36000" tIns="18000" rIns="36000" bIns="18000"/>
-          <a:lstStyle/>
+              <a:t>予約の取れる</a:t>
+            </a:r>
+          </a:p>
           <a:p>
             <a:pPr algn="ctr">
               <a:lnSpc>
@@ -5348,9 +5348,88 @@
                 <a:ea typeface="メイリオ"/>
                 <a:cs typeface="メイリオ"/>
               </a:rPr>
-              <a:t>Metaと比べて</a:t>
-            </a:r>
-          </a:p>
+              <a:t>エリアに寄せる</a:t>
+            </a:r>
+          </a:p>
+        </p:txBody>
+      </p:sp>
+      <p:cxnSp>
+        <p:nvCxnSpPr>
+          <p:cNvPr id="13" name="Connector 12"/>
+          <p:cNvCxnSpPr/>
+          <p:nvPr/>
+        </p:nvCxnSpPr>
+        <p:spPr>
+          <a:xfrm>
+            <a:off x="7129800" y="2249999"/>
+            <a:ext cx="143999" cy="0"/>
+          </a:xfrm>
+          <a:prstGeom prst="line">
+            <a:avLst/>
+          </a:prstGeom>
+          <a:ln w="19050">
+            <a:solidFill>
+              <a:srgbClr val="1F285A"/>
+            </a:solidFill>
+            <a:tailEnd type="triangle" w="med" len="med"/>
+          </a:ln>
+        </p:spPr>
+        <p:style>
+          <a:lnRef idx="2">
+            <a:schemeClr val="accent1"/>
+          </a:lnRef>
+          <a:fillRef idx="0">
+            <a:schemeClr val="accent1"/>
+          </a:fillRef>
+          <a:effectRef idx="0">
+            <a:schemeClr val="accent1"/>
+          </a:effectRef>
+          <a:fontRef idx="minor">
+            <a:schemeClr val="tx1"/>
+          </a:fontRef>
+        </p:style>
+      </p:cxnSp>
+      <p:sp>
+        <p:nvSpPr>
+          <p:cNvPr id="14" name="Rectangle 13"/>
+          <p:cNvSpPr/>
+          <p:nvPr/>
+        </p:nvSpPr>
+        <p:spPr>
+          <a:xfrm>
+            <a:off x="7309799" y="1961999"/>
+            <a:ext cx="1963799" cy="576000"/>
+          </a:xfrm>
+          <a:prstGeom prst="rect">
+            <a:avLst/>
+          </a:prstGeom>
+          <a:solidFill>
+            <a:srgbClr val="1F285A"/>
+          </a:solidFill>
+          <a:ln w="12700">
+            <a:solidFill>
+              <a:srgbClr val="1F285A"/>
+            </a:solidFill>
+          </a:ln>
+          <a:effectLst/>
+        </p:spPr>
+        <p:style>
+          <a:lnRef idx="1">
+            <a:schemeClr val="accent1"/>
+          </a:lnRef>
+          <a:fillRef idx="3">
+            <a:schemeClr val="accent1"/>
+          </a:fillRef>
+          <a:effectRef idx="0">
+            <a:schemeClr val="accent1"/>
+          </a:effectRef>
+          <a:fontRef idx="minor">
+            <a:schemeClr val="lt1"/>
+          </a:fontRef>
+        </p:style>
+        <p:txBody>
+          <a:bodyPr rtlCol="0" anchor="ctr" wrap="square" lIns="36000" tIns="18000" rIns="36000" bIns="18000"/>
+          <a:lstStyle/>
           <a:p>
             <a:pPr algn="ctr">
               <a:lnSpc>
@@ -5361,96 +5440,17 @@
               </a:spcAft>
             </a:pPr>
             <a:r>
-              <a:rPr sz="1150" b="0">
-                <a:solidFill>
-                  <a:srgbClr val="333333"/>
+              <a:rPr sz="1150" b="1">
+                <a:solidFill>
+                  <a:srgbClr val="FFFFFF"/>
                 </a:solidFill>
                 <a:latin typeface="メイリオ"/>
                 <a:ea typeface="メイリオ"/>
                 <a:cs typeface="メイリオ"/>
               </a:rPr>
-              <a:t>続けるかを判断</a:t>
-            </a:r>
-          </a:p>
-        </p:txBody>
-      </p:sp>
-      <p:cxnSp>
-        <p:nvCxnSpPr>
-          <p:cNvPr id="13" name="Connector 12"/>
-          <p:cNvCxnSpPr/>
-          <p:nvPr/>
-        </p:nvCxnSpPr>
-        <p:spPr>
-          <a:xfrm>
-            <a:off x="7129800" y="2249999"/>
-            <a:ext cx="143999" cy="0"/>
-          </a:xfrm>
-          <a:prstGeom prst="line">
-            <a:avLst/>
-          </a:prstGeom>
-          <a:ln w="19050">
-            <a:solidFill>
-              <a:srgbClr val="1F285A"/>
-            </a:solidFill>
-            <a:tailEnd type="triangle" w="med" len="med"/>
-          </a:ln>
-        </p:spPr>
-        <p:style>
-          <a:lnRef idx="2">
-            <a:schemeClr val="accent1"/>
-          </a:lnRef>
-          <a:fillRef idx="0">
-            <a:schemeClr val="accent1"/>
-          </a:fillRef>
-          <a:effectRef idx="0">
-            <a:schemeClr val="accent1"/>
-          </a:effectRef>
-          <a:fontRef idx="minor">
-            <a:schemeClr val="tx1"/>
-          </a:fontRef>
-        </p:style>
-      </p:cxnSp>
-      <p:sp>
-        <p:nvSpPr>
-          <p:cNvPr id="14" name="Rectangle 13"/>
-          <p:cNvSpPr/>
-          <p:nvPr/>
-        </p:nvSpPr>
-        <p:spPr>
-          <a:xfrm>
-            <a:off x="7309799" y="1961999"/>
-            <a:ext cx="1963799" cy="576000"/>
-          </a:xfrm>
-          <a:prstGeom prst="rect">
-            <a:avLst/>
-          </a:prstGeom>
-          <a:solidFill>
-            <a:srgbClr val="1F285A"/>
-          </a:solidFill>
-          <a:ln w="12700">
-            <a:solidFill>
-              <a:srgbClr val="1F285A"/>
-            </a:solidFill>
-          </a:ln>
-          <a:effectLst/>
-        </p:spPr>
-        <p:style>
-          <a:lnRef idx="1">
-            <a:schemeClr val="accent1"/>
-          </a:lnRef>
-          <a:fillRef idx="3">
-            <a:schemeClr val="accent1"/>
-          </a:fillRef>
-          <a:effectRef idx="0">
-            <a:schemeClr val="accent1"/>
-          </a:effectRef>
-          <a:fontRef idx="minor">
-            <a:schemeClr val="lt1"/>
-          </a:fontRef>
-        </p:style>
-        <p:txBody>
-          <a:bodyPr rtlCol="0" anchor="ctr" wrap="square" lIns="36000" tIns="18000" rIns="36000" bIns="18000"/>
-          <a:lstStyle/>
+              <a:t>訴求・クリエイティブ</a:t>
+            </a:r>
+          </a:p>
           <a:p>
             <a:pPr algn="ctr">
               <a:lnSpc>
@@ -5469,28 +5469,7 @@
                 <a:ea typeface="メイリオ"/>
                 <a:cs typeface="メイリオ"/>
               </a:rPr>
-              <a:t>効果が見えた分だけ</a:t>
-            </a:r>
-          </a:p>
-          <a:p>
-            <a:pPr algn="ctr">
-              <a:lnSpc>
-                <a:spcPct val="110000"/>
-              </a:lnSpc>
-              <a:spcAft>
-                <a:spcPts val="0"/>
-              </a:spcAft>
-            </a:pPr>
-            <a:r>
-              <a:rPr sz="1150" b="1">
-                <a:solidFill>
-                  <a:srgbClr val="FFFFFF"/>
-                </a:solidFill>
-                <a:latin typeface="メイリオ"/>
-                <a:ea typeface="メイリオ"/>
-                <a:cs typeface="メイリオ"/>
-              </a:rPr>
-              <a:t>予算を広げる</a:t>
+              <a:t>を見直す</a:t>
             </a:r>
           </a:p>
         </p:txBody>
@@ -5578,7 +5557,7 @@
                 <a:ea typeface="メイリオ"/>
                 <a:cs typeface="メイリオ"/>
               </a:rPr>
-              <a:t>判断の基準</a:t>
+              <a:t>毎月お出しするもの</a:t>
             </a:r>
           </a:p>
         </p:txBody>
@@ -5622,7 +5601,7 @@
                 <a:ea typeface="メイリオ"/>
                 <a:cs typeface="メイリオ"/>
               </a:rPr>
-              <a:t>続ける</a:t>
+              <a:t>レポート</a:t>
             </a:r>
           </a:p>
         </p:txBody>
@@ -5666,7 +5645,7 @@
                 <a:ea typeface="メイリオ"/>
                 <a:cs typeface="メイリオ"/>
               </a:rPr>
-              <a:t>予約1件あたりの広告費が、Meta（15,000円）を下回る</a:t>
+              <a:t>エリア別・訴求別の予約数と、予約1件あたりの広告費（Metaと並べて比較）</a:t>
             </a:r>
           </a:p>
         </p:txBody>
@@ -5710,7 +5689,7 @@
                 <a:ea typeface="メイリオ"/>
                 <a:cs typeface="メイリオ"/>
               </a:rPr>
-              <a:t>見直す</a:t>
+              <a:t>次の打ち手</a:t>
             </a:r>
           </a:p>
         </p:txBody>
@@ -5724,270 +5703,6 @@
         <p:spPr>
           <a:xfrm>
             <a:off x="2426400" y="3319199"/>
-            <a:ext cx="6847199" cy="259200"/>
-          </a:xfrm>
-          <a:prstGeom prst="rect">
-            <a:avLst/>
-          </a:prstGeom>
-          <a:noFill/>
-        </p:spPr>
-        <p:txBody>
-          <a:bodyPr wrap="square" anchor="t" lIns="36000" rIns="36000" tIns="10800" bIns="10800">
-            <a:spAutoFit/>
-          </a:bodyPr>
-          <a:lstStyle/>
-          <a:p>
-            <a:pPr algn="l">
-              <a:lnSpc>
-                <a:spcPct val="105000"/>
-              </a:lnSpc>
-              <a:spcAft>
-                <a:spcPts val="200"/>
-              </a:spcAft>
-            </a:pPr>
-            <a:r>
-              <a:rPr sz="1300" b="0">
-                <a:solidFill>
-                  <a:srgbClr val="333333"/>
-                </a:solidFill>
-                <a:latin typeface="メイリオ"/>
-                <a:ea typeface="メイリオ"/>
-                <a:cs typeface="メイリオ"/>
-              </a:rPr>
-              <a:t>下回らない場合は、配信エリア・訴求を見直すか、配信を止める</a:t>
-            </a:r>
-          </a:p>
-        </p:txBody>
-      </p:sp>
-      <p:sp>
-        <p:nvSpPr>
-          <p:cNvPr id="21" name="Rectangle 20"/>
-          <p:cNvSpPr/>
-          <p:nvPr/>
-        </p:nvSpPr>
-        <p:spPr>
-          <a:xfrm>
-            <a:off x="644400" y="3808799"/>
-            <a:ext cx="54000" cy="180000"/>
-          </a:xfrm>
-          <a:prstGeom prst="rect">
-            <a:avLst/>
-          </a:prstGeom>
-          <a:solidFill>
-            <a:srgbClr val="1F285A"/>
-          </a:solidFill>
-          <a:ln>
-            <a:noFill/>
-          </a:ln>
-          <a:effectLst/>
-        </p:spPr>
-        <p:style>
-          <a:lnRef idx="1">
-            <a:schemeClr val="accent1"/>
-          </a:lnRef>
-          <a:fillRef idx="3">
-            <a:schemeClr val="accent1"/>
-          </a:fillRef>
-          <a:effectRef idx="0">
-            <a:schemeClr val="accent1"/>
-          </a:effectRef>
-          <a:fontRef idx="minor">
-            <a:schemeClr val="lt1"/>
-          </a:fontRef>
-        </p:style>
-        <p:txBody>
-          <a:bodyPr rtlCol="0" anchor="ctr" wrap="square" lIns="72000" tIns="18000" rIns="72000" bIns="18000"/>
-          <a:lstStyle/>
-          <a:p>
-            <a:pPr algn="ctr"/>
-          </a:p>
-        </p:txBody>
-      </p:sp>
-      <p:sp>
-        <p:nvSpPr>
-          <p:cNvPr id="22" name="TextBox 21"/>
-          <p:cNvSpPr txBox="1"/>
-          <p:nvPr/>
-        </p:nvSpPr>
-        <p:spPr>
-          <a:xfrm>
-            <a:off x="770400" y="3758399"/>
-            <a:ext cx="8503200" cy="288000"/>
-          </a:xfrm>
-          <a:prstGeom prst="rect">
-            <a:avLst/>
-          </a:prstGeom>
-          <a:noFill/>
-        </p:spPr>
-        <p:txBody>
-          <a:bodyPr wrap="square" anchor="t" lIns="36000" rIns="36000" tIns="10800" bIns="10800">
-            <a:spAutoFit/>
-          </a:bodyPr>
-          <a:lstStyle/>
-          <a:p>
-            <a:pPr algn="l">
-              <a:lnSpc>
-                <a:spcPct val="105000"/>
-              </a:lnSpc>
-              <a:spcAft>
-                <a:spcPts val="200"/>
-              </a:spcAft>
-            </a:pPr>
-            <a:r>
-              <a:rPr sz="1350" b="1">
-                <a:solidFill>
-                  <a:srgbClr val="1F285A"/>
-                </a:solidFill>
-                <a:latin typeface="メイリオ"/>
-                <a:ea typeface="メイリオ"/>
-                <a:cs typeface="メイリオ"/>
-              </a:rPr>
-              <a:t>毎月お出しするもの</a:t>
-            </a:r>
-          </a:p>
-        </p:txBody>
-      </p:sp>
-      <p:sp>
-        <p:nvSpPr>
-          <p:cNvPr id="23" name="TextBox 22"/>
-          <p:cNvSpPr txBox="1"/>
-          <p:nvPr/>
-        </p:nvSpPr>
-        <p:spPr>
-          <a:xfrm>
-            <a:off x="770400" y="4064399"/>
-            <a:ext cx="1655999" cy="259200"/>
-          </a:xfrm>
-          <a:prstGeom prst="rect">
-            <a:avLst/>
-          </a:prstGeom>
-          <a:noFill/>
-        </p:spPr>
-        <p:txBody>
-          <a:bodyPr wrap="square" anchor="t" lIns="36000" rIns="36000" tIns="10800" bIns="10800">
-            <a:spAutoFit/>
-          </a:bodyPr>
-          <a:lstStyle/>
-          <a:p>
-            <a:pPr algn="l">
-              <a:lnSpc>
-                <a:spcPct val="105000"/>
-              </a:lnSpc>
-              <a:spcAft>
-                <a:spcPts val="200"/>
-              </a:spcAft>
-            </a:pPr>
-            <a:r>
-              <a:rPr sz="1300" b="1">
-                <a:solidFill>
-                  <a:srgbClr val="333333"/>
-                </a:solidFill>
-                <a:latin typeface="メイリオ"/>
-                <a:ea typeface="メイリオ"/>
-                <a:cs typeface="メイリオ"/>
-              </a:rPr>
-              <a:t>レポート</a:t>
-            </a:r>
-          </a:p>
-        </p:txBody>
-      </p:sp>
-      <p:sp>
-        <p:nvSpPr>
-          <p:cNvPr id="24" name="TextBox 23"/>
-          <p:cNvSpPr txBox="1"/>
-          <p:nvPr/>
-        </p:nvSpPr>
-        <p:spPr>
-          <a:xfrm>
-            <a:off x="2426400" y="4064399"/>
-            <a:ext cx="6847199" cy="259200"/>
-          </a:xfrm>
-          <a:prstGeom prst="rect">
-            <a:avLst/>
-          </a:prstGeom>
-          <a:noFill/>
-        </p:spPr>
-        <p:txBody>
-          <a:bodyPr wrap="square" anchor="t" lIns="36000" rIns="36000" tIns="10800" bIns="10800">
-            <a:spAutoFit/>
-          </a:bodyPr>
-          <a:lstStyle/>
-          <a:p>
-            <a:pPr algn="l">
-              <a:lnSpc>
-                <a:spcPct val="105000"/>
-              </a:lnSpc>
-              <a:spcAft>
-                <a:spcPts val="200"/>
-              </a:spcAft>
-            </a:pPr>
-            <a:r>
-              <a:rPr sz="1300" b="0">
-                <a:solidFill>
-                  <a:srgbClr val="333333"/>
-                </a:solidFill>
-                <a:latin typeface="メイリオ"/>
-                <a:ea typeface="メイリオ"/>
-                <a:cs typeface="メイリオ"/>
-              </a:rPr>
-              <a:t>エリア別の予約数・予約1件あたりの広告費・Metaとの比較</a:t>
-            </a:r>
-          </a:p>
-        </p:txBody>
-      </p:sp>
-      <p:sp>
-        <p:nvSpPr>
-          <p:cNvPr id="25" name="TextBox 24"/>
-          <p:cNvSpPr txBox="1"/>
-          <p:nvPr/>
-        </p:nvSpPr>
-        <p:spPr>
-          <a:xfrm>
-            <a:off x="770400" y="4323599"/>
-            <a:ext cx="1655999" cy="259200"/>
-          </a:xfrm>
-          <a:prstGeom prst="rect">
-            <a:avLst/>
-          </a:prstGeom>
-          <a:noFill/>
-        </p:spPr>
-        <p:txBody>
-          <a:bodyPr wrap="square" anchor="t" lIns="36000" rIns="36000" tIns="10800" bIns="10800">
-            <a:spAutoFit/>
-          </a:bodyPr>
-          <a:lstStyle/>
-          <a:p>
-            <a:pPr algn="l">
-              <a:lnSpc>
-                <a:spcPct val="105000"/>
-              </a:lnSpc>
-              <a:spcAft>
-                <a:spcPts val="200"/>
-              </a:spcAft>
-            </a:pPr>
-            <a:r>
-              <a:rPr sz="1300" b="1">
-                <a:solidFill>
-                  <a:srgbClr val="333333"/>
-                </a:solidFill>
-                <a:latin typeface="メイリオ"/>
-                <a:ea typeface="メイリオ"/>
-                <a:cs typeface="メイリオ"/>
-              </a:rPr>
-              <a:t>次の打ち手</a:t>
-            </a:r>
-          </a:p>
-        </p:txBody>
-      </p:sp>
-      <p:sp>
-        <p:nvSpPr>
-          <p:cNvPr id="26" name="TextBox 25"/>
-          <p:cNvSpPr txBox="1"/>
-          <p:nvPr/>
-        </p:nvSpPr>
-        <p:spPr>
-          <a:xfrm>
-            <a:off x="2426400" y="4323599"/>
             <a:ext cx="6847199" cy="259200"/>
           </a:xfrm>
           <a:prstGeom prst="rect">

--- a/20261013_展示会LINE運用方針_予算枠のご提案.pptx
+++ b/20261013_展示会LINE運用方針_予算枠のご提案.pptx
@@ -4809,6 +4809,465 @@
                 <a:cs typeface="メイリオ"/>
               </a:rPr>
               <a:t>仮に月10万円 → クリック1,000（CPC 100円）→ 予約10件（予約率1.0%）→ 予約1件あたりの広告費 10,000円</a:t>
+            </a:r>
+          </a:p>
+        </p:txBody>
+      </p:sp>
+      <p:sp>
+        <p:nvSpPr>
+          <p:cNvPr id="22" name="Rectangle 21"/>
+          <p:cNvSpPr/>
+          <p:nvPr/>
+        </p:nvSpPr>
+        <p:spPr>
+          <a:xfrm>
+            <a:off x="644400" y="4554000"/>
+            <a:ext cx="54000" cy="180000"/>
+          </a:xfrm>
+          <a:prstGeom prst="rect">
+            <a:avLst/>
+          </a:prstGeom>
+          <a:solidFill>
+            <a:srgbClr val="1F285A"/>
+          </a:solidFill>
+          <a:ln>
+            <a:noFill/>
+          </a:ln>
+          <a:effectLst/>
+        </p:spPr>
+        <p:style>
+          <a:lnRef idx="1">
+            <a:schemeClr val="accent1"/>
+          </a:lnRef>
+          <a:fillRef idx="3">
+            <a:schemeClr val="accent1"/>
+          </a:fillRef>
+          <a:effectRef idx="0">
+            <a:schemeClr val="accent1"/>
+          </a:effectRef>
+          <a:fontRef idx="minor">
+            <a:schemeClr val="lt1"/>
+          </a:fontRef>
+        </p:style>
+        <p:txBody>
+          <a:bodyPr rtlCol="0" anchor="ctr" wrap="square" lIns="72000" tIns="18000" rIns="72000" bIns="18000"/>
+          <a:lstStyle/>
+          <a:p>
+            <a:pPr algn="ctr"/>
+          </a:p>
+        </p:txBody>
+      </p:sp>
+      <p:sp>
+        <p:nvSpPr>
+          <p:cNvPr id="23" name="TextBox 22"/>
+          <p:cNvSpPr txBox="1"/>
+          <p:nvPr/>
+        </p:nvSpPr>
+        <p:spPr>
+          <a:xfrm>
+            <a:off x="770400" y="4503600"/>
+            <a:ext cx="8503200" cy="288000"/>
+          </a:xfrm>
+          <a:prstGeom prst="rect">
+            <a:avLst/>
+          </a:prstGeom>
+          <a:noFill/>
+        </p:spPr>
+        <p:txBody>
+          <a:bodyPr wrap="square" anchor="t" lIns="36000" rIns="36000" tIns="10800" bIns="10800">
+            <a:spAutoFit/>
+          </a:bodyPr>
+          <a:lstStyle/>
+          <a:p>
+            <a:pPr algn="l">
+              <a:lnSpc>
+                <a:spcPct val="105000"/>
+              </a:lnSpc>
+              <a:spcAft>
+                <a:spcPts val="200"/>
+              </a:spcAft>
+            </a:pPr>
+            <a:r>
+              <a:rPr sz="1350" b="1">
+                <a:solidFill>
+                  <a:srgbClr val="1F285A"/>
+                </a:solidFill>
+                <a:latin typeface="メイリオ"/>
+                <a:ea typeface="メイリオ"/>
+                <a:cs typeface="メイリオ"/>
+              </a:rPr>
+              <a:t>今の予算の中で始める場合</a:t>
+            </a:r>
+          </a:p>
+        </p:txBody>
+      </p:sp>
+      <p:sp>
+        <p:nvSpPr>
+          <p:cNvPr id="24" name="Rectangle 23"/>
+          <p:cNvSpPr/>
+          <p:nvPr/>
+        </p:nvSpPr>
+        <p:spPr>
+          <a:xfrm>
+            <a:off x="770400" y="4845600"/>
+            <a:ext cx="2654399" cy="486000"/>
+          </a:xfrm>
+          <a:prstGeom prst="rect">
+            <a:avLst/>
+          </a:prstGeom>
+          <a:solidFill>
+            <a:srgbClr val="FFFFFF"/>
+          </a:solidFill>
+          <a:ln w="12700">
+            <a:solidFill>
+              <a:srgbClr val="1F285A"/>
+            </a:solidFill>
+          </a:ln>
+          <a:effectLst/>
+        </p:spPr>
+        <p:style>
+          <a:lnRef idx="1">
+            <a:schemeClr val="accent1"/>
+          </a:lnRef>
+          <a:fillRef idx="3">
+            <a:schemeClr val="accent1"/>
+          </a:fillRef>
+          <a:effectRef idx="0">
+            <a:schemeClr val="accent1"/>
+          </a:effectRef>
+          <a:fontRef idx="minor">
+            <a:schemeClr val="lt1"/>
+          </a:fontRef>
+        </p:style>
+        <p:txBody>
+          <a:bodyPr rtlCol="0" anchor="ctr" wrap="square" lIns="36000" tIns="18000" rIns="36000" bIns="18000"/>
+          <a:lstStyle/>
+          <a:p>
+            <a:pPr algn="ctr">
+              <a:lnSpc>
+                <a:spcPct val="110000"/>
+              </a:lnSpc>
+              <a:spcAft>
+                <a:spcPts val="0"/>
+              </a:spcAft>
+            </a:pPr>
+            <a:r>
+              <a:rPr sz="1150" b="0">
+                <a:solidFill>
+                  <a:srgbClr val="333333"/>
+                </a:solidFill>
+                <a:latin typeface="メイリオ"/>
+                <a:ea typeface="メイリオ"/>
+                <a:cs typeface="メイリオ"/>
+              </a:rPr>
+              <a:t>銀座店</a:t>
+            </a:r>
+          </a:p>
+          <a:p>
+            <a:pPr algn="ctr">
+              <a:lnSpc>
+                <a:spcPct val="110000"/>
+              </a:lnSpc>
+              <a:spcAft>
+                <a:spcPts val="0"/>
+              </a:spcAft>
+            </a:pPr>
+            <a:r>
+              <a:rPr sz="1150" b="0">
+                <a:solidFill>
+                  <a:srgbClr val="333333"/>
+                </a:solidFill>
+                <a:latin typeface="メイリオ"/>
+                <a:ea typeface="メイリオ"/>
+                <a:cs typeface="メイリオ"/>
+              </a:rPr>
+              <a:t>Meta広告 30万円</a:t>
+            </a:r>
+          </a:p>
+        </p:txBody>
+      </p:sp>
+      <p:cxnSp>
+        <p:nvCxnSpPr>
+          <p:cNvPr id="25" name="Connector 24"/>
+          <p:cNvCxnSpPr/>
+          <p:nvPr/>
+        </p:nvCxnSpPr>
+        <p:spPr>
+          <a:xfrm>
+            <a:off x="3460799" y="5088600"/>
+            <a:ext cx="198000" cy="0"/>
+          </a:xfrm>
+          <a:prstGeom prst="line">
+            <a:avLst/>
+          </a:prstGeom>
+          <a:ln w="19050">
+            <a:solidFill>
+              <a:srgbClr val="1F285A"/>
+            </a:solidFill>
+            <a:tailEnd type="triangle" w="med" len="med"/>
+          </a:ln>
+        </p:spPr>
+        <p:style>
+          <a:lnRef idx="2">
+            <a:schemeClr val="accent1"/>
+          </a:lnRef>
+          <a:fillRef idx="0">
+            <a:schemeClr val="accent1"/>
+          </a:fillRef>
+          <a:effectRef idx="0">
+            <a:schemeClr val="accent1"/>
+          </a:effectRef>
+          <a:fontRef idx="minor">
+            <a:schemeClr val="tx1"/>
+          </a:fontRef>
+        </p:style>
+      </p:cxnSp>
+      <p:sp>
+        <p:nvSpPr>
+          <p:cNvPr id="26" name="Rectangle 25"/>
+          <p:cNvSpPr/>
+          <p:nvPr/>
+        </p:nvSpPr>
+        <p:spPr>
+          <a:xfrm>
+            <a:off x="3694799" y="4845600"/>
+            <a:ext cx="2654399" cy="486000"/>
+          </a:xfrm>
+          <a:prstGeom prst="rect">
+            <a:avLst/>
+          </a:prstGeom>
+          <a:solidFill>
+            <a:srgbClr val="FFFFFF"/>
+          </a:solidFill>
+          <a:ln w="12700">
+            <a:solidFill>
+              <a:srgbClr val="1F285A"/>
+            </a:solidFill>
+          </a:ln>
+          <a:effectLst/>
+        </p:spPr>
+        <p:style>
+          <a:lnRef idx="1">
+            <a:schemeClr val="accent1"/>
+          </a:lnRef>
+          <a:fillRef idx="3">
+            <a:schemeClr val="accent1"/>
+          </a:fillRef>
+          <a:effectRef idx="0">
+            <a:schemeClr val="accent1"/>
+          </a:effectRef>
+          <a:fontRef idx="minor">
+            <a:schemeClr val="lt1"/>
+          </a:fontRef>
+        </p:style>
+        <p:txBody>
+          <a:bodyPr rtlCol="0" anchor="ctr" wrap="square" lIns="36000" tIns="18000" rIns="36000" bIns="18000"/>
+          <a:lstStyle/>
+          <a:p>
+            <a:pPr algn="ctr">
+              <a:lnSpc>
+                <a:spcPct val="110000"/>
+              </a:lnSpc>
+              <a:spcAft>
+                <a:spcPts val="0"/>
+              </a:spcAft>
+            </a:pPr>
+            <a:r>
+              <a:rPr sz="1150" b="0">
+                <a:solidFill>
+                  <a:srgbClr val="333333"/>
+                </a:solidFill>
+                <a:latin typeface="メイリオ"/>
+                <a:ea typeface="メイリオ"/>
+                <a:cs typeface="メイリオ"/>
+              </a:rPr>
+              <a:t>Meta広告 20万円</a:t>
+            </a:r>
+          </a:p>
+          <a:p>
+            <a:pPr algn="ctr">
+              <a:lnSpc>
+                <a:spcPct val="110000"/>
+              </a:lnSpc>
+              <a:spcAft>
+                <a:spcPts val="0"/>
+              </a:spcAft>
+            </a:pPr>
+            <a:r>
+              <a:rPr sz="1150" b="0">
+                <a:solidFill>
+                  <a:srgbClr val="333333"/>
+                </a:solidFill>
+                <a:latin typeface="メイリオ"/>
+                <a:ea typeface="メイリオ"/>
+                <a:cs typeface="メイリオ"/>
+              </a:rPr>
+              <a:t>（出しすぎ分を削る）</a:t>
+            </a:r>
+          </a:p>
+        </p:txBody>
+      </p:sp>
+      <p:cxnSp>
+        <p:nvCxnSpPr>
+          <p:cNvPr id="27" name="Connector 26"/>
+          <p:cNvCxnSpPr/>
+          <p:nvPr/>
+        </p:nvCxnSpPr>
+        <p:spPr>
+          <a:xfrm>
+            <a:off x="6385199" y="5088600"/>
+            <a:ext cx="198000" cy="0"/>
+          </a:xfrm>
+          <a:prstGeom prst="line">
+            <a:avLst/>
+          </a:prstGeom>
+          <a:ln w="19050">
+            <a:solidFill>
+              <a:srgbClr val="1F285A"/>
+            </a:solidFill>
+            <a:tailEnd type="triangle" w="med" len="med"/>
+          </a:ln>
+        </p:spPr>
+        <p:style>
+          <a:lnRef idx="2">
+            <a:schemeClr val="accent1"/>
+          </a:lnRef>
+          <a:fillRef idx="0">
+            <a:schemeClr val="accent1"/>
+          </a:fillRef>
+          <a:effectRef idx="0">
+            <a:schemeClr val="accent1"/>
+          </a:effectRef>
+          <a:fontRef idx="minor">
+            <a:schemeClr val="tx1"/>
+          </a:fontRef>
+        </p:style>
+      </p:cxnSp>
+      <p:sp>
+        <p:nvSpPr>
+          <p:cNvPr id="28" name="Rectangle 27"/>
+          <p:cNvSpPr/>
+          <p:nvPr/>
+        </p:nvSpPr>
+        <p:spPr>
+          <a:xfrm>
+            <a:off x="6619199" y="4845600"/>
+            <a:ext cx="2654399" cy="486000"/>
+          </a:xfrm>
+          <a:prstGeom prst="rect">
+            <a:avLst/>
+          </a:prstGeom>
+          <a:solidFill>
+            <a:srgbClr val="1F285A"/>
+          </a:solidFill>
+          <a:ln w="12700">
+            <a:solidFill>
+              <a:srgbClr val="1F285A"/>
+            </a:solidFill>
+          </a:ln>
+          <a:effectLst/>
+        </p:spPr>
+        <p:style>
+          <a:lnRef idx="1">
+            <a:schemeClr val="accent1"/>
+          </a:lnRef>
+          <a:fillRef idx="3">
+            <a:schemeClr val="accent1"/>
+          </a:fillRef>
+          <a:effectRef idx="0">
+            <a:schemeClr val="accent1"/>
+          </a:effectRef>
+          <a:fontRef idx="minor">
+            <a:schemeClr val="lt1"/>
+          </a:fontRef>
+        </p:style>
+        <p:txBody>
+          <a:bodyPr rtlCol="0" anchor="ctr" wrap="square" lIns="36000" tIns="18000" rIns="36000" bIns="18000"/>
+          <a:lstStyle/>
+          <a:p>
+            <a:pPr algn="ctr">
+              <a:lnSpc>
+                <a:spcPct val="110000"/>
+              </a:lnSpc>
+              <a:spcAft>
+                <a:spcPts val="0"/>
+              </a:spcAft>
+            </a:pPr>
+            <a:r>
+              <a:rPr sz="1150" b="1">
+                <a:solidFill>
+                  <a:srgbClr val="FFFFFF"/>
+                </a:solidFill>
+                <a:latin typeface="メイリオ"/>
+                <a:ea typeface="メイリオ"/>
+                <a:cs typeface="メイリオ"/>
+              </a:rPr>
+              <a:t>LINE広告 10万円</a:t>
+            </a:r>
+          </a:p>
+          <a:p>
+            <a:pPr algn="ctr">
+              <a:lnSpc>
+                <a:spcPct val="110000"/>
+              </a:lnSpc>
+              <a:spcAft>
+                <a:spcPts val="0"/>
+              </a:spcAft>
+            </a:pPr>
+            <a:r>
+              <a:rPr sz="1150" b="1">
+                <a:solidFill>
+                  <a:srgbClr val="FFFFFF"/>
+                </a:solidFill>
+                <a:latin typeface="メイリオ"/>
+                <a:ea typeface="メイリオ"/>
+                <a:cs typeface="メイリオ"/>
+              </a:rPr>
+              <a:t>（削った分を回す）</a:t>
+            </a:r>
+          </a:p>
+        </p:txBody>
+      </p:sp>
+      <p:sp>
+        <p:nvSpPr>
+          <p:cNvPr id="29" name="TextBox 28"/>
+          <p:cNvSpPr txBox="1"/>
+          <p:nvPr/>
+        </p:nvSpPr>
+        <p:spPr>
+          <a:xfrm>
+            <a:off x="644400" y="5385600"/>
+            <a:ext cx="8629200" cy="216000"/>
+          </a:xfrm>
+          <a:prstGeom prst="rect">
+            <a:avLst/>
+          </a:prstGeom>
+          <a:noFill/>
+        </p:spPr>
+        <p:txBody>
+          <a:bodyPr wrap="square" anchor="t" lIns="36000" rIns="36000" tIns="10800" bIns="10800">
+            <a:spAutoFit/>
+          </a:bodyPr>
+          <a:lstStyle/>
+          <a:p>
+            <a:pPr algn="l">
+              <a:lnSpc>
+                <a:spcPct val="105000"/>
+              </a:lnSpc>
+              <a:spcAft>
+                <a:spcPts val="200"/>
+              </a:spcAft>
+            </a:pPr>
+            <a:r>
+              <a:rPr sz="1100" b="0">
+                <a:solidFill>
+                  <a:srgbClr val="7F7F7F"/>
+                </a:solidFill>
+                <a:latin typeface="メイリオ"/>
+                <a:ea typeface="メイリオ"/>
+                <a:cs typeface="メイリオ"/>
+              </a:rPr>
+              <a:t>出しすぎている店舗だけが対象。店舗ごとの総額は変わらない</a:t>
             </a:r>
           </a:p>
         </p:txBody>

--- a/20261013_展示会LINE運用方針_予算枠のご提案.pptx
+++ b/20261013_展示会LINE運用方針_予算枠のご提案.pptx
@@ -4809,465 +4809,6 @@
                 <a:cs typeface="メイリオ"/>
               </a:rPr>
               <a:t>仮に月10万円 → クリック1,000（CPC 100円）→ 予約10件（予約率1.0%）→ 予約1件あたりの広告費 10,000円</a:t>
-            </a:r>
-          </a:p>
-        </p:txBody>
-      </p:sp>
-      <p:sp>
-        <p:nvSpPr>
-          <p:cNvPr id="22" name="Rectangle 21"/>
-          <p:cNvSpPr/>
-          <p:nvPr/>
-        </p:nvSpPr>
-        <p:spPr>
-          <a:xfrm>
-            <a:off x="644400" y="4554000"/>
-            <a:ext cx="54000" cy="180000"/>
-          </a:xfrm>
-          <a:prstGeom prst="rect">
-            <a:avLst/>
-          </a:prstGeom>
-          <a:solidFill>
-            <a:srgbClr val="1F285A"/>
-          </a:solidFill>
-          <a:ln>
-            <a:noFill/>
-          </a:ln>
-          <a:effectLst/>
-        </p:spPr>
-        <p:style>
-          <a:lnRef idx="1">
-            <a:schemeClr val="accent1"/>
-          </a:lnRef>
-          <a:fillRef idx="3">
-            <a:schemeClr val="accent1"/>
-          </a:fillRef>
-          <a:effectRef idx="0">
-            <a:schemeClr val="accent1"/>
-          </a:effectRef>
-          <a:fontRef idx="minor">
-            <a:schemeClr val="lt1"/>
-          </a:fontRef>
-        </p:style>
-        <p:txBody>
-          <a:bodyPr rtlCol="0" anchor="ctr" wrap="square" lIns="72000" tIns="18000" rIns="72000" bIns="18000"/>
-          <a:lstStyle/>
-          <a:p>
-            <a:pPr algn="ctr"/>
-          </a:p>
-        </p:txBody>
-      </p:sp>
-      <p:sp>
-        <p:nvSpPr>
-          <p:cNvPr id="23" name="TextBox 22"/>
-          <p:cNvSpPr txBox="1"/>
-          <p:nvPr/>
-        </p:nvSpPr>
-        <p:spPr>
-          <a:xfrm>
-            <a:off x="770400" y="4503600"/>
-            <a:ext cx="8503200" cy="288000"/>
-          </a:xfrm>
-          <a:prstGeom prst="rect">
-            <a:avLst/>
-          </a:prstGeom>
-          <a:noFill/>
-        </p:spPr>
-        <p:txBody>
-          <a:bodyPr wrap="square" anchor="t" lIns="36000" rIns="36000" tIns="10800" bIns="10800">
-            <a:spAutoFit/>
-          </a:bodyPr>
-          <a:lstStyle/>
-          <a:p>
-            <a:pPr algn="l">
-              <a:lnSpc>
-                <a:spcPct val="105000"/>
-              </a:lnSpc>
-              <a:spcAft>
-                <a:spcPts val="200"/>
-              </a:spcAft>
-            </a:pPr>
-            <a:r>
-              <a:rPr sz="1350" b="1">
-                <a:solidFill>
-                  <a:srgbClr val="1F285A"/>
-                </a:solidFill>
-                <a:latin typeface="メイリオ"/>
-                <a:ea typeface="メイリオ"/>
-                <a:cs typeface="メイリオ"/>
-              </a:rPr>
-              <a:t>今の予算の中で始める場合</a:t>
-            </a:r>
-          </a:p>
-        </p:txBody>
-      </p:sp>
-      <p:sp>
-        <p:nvSpPr>
-          <p:cNvPr id="24" name="Rectangle 23"/>
-          <p:cNvSpPr/>
-          <p:nvPr/>
-        </p:nvSpPr>
-        <p:spPr>
-          <a:xfrm>
-            <a:off x="770400" y="4845600"/>
-            <a:ext cx="2654399" cy="486000"/>
-          </a:xfrm>
-          <a:prstGeom prst="rect">
-            <a:avLst/>
-          </a:prstGeom>
-          <a:solidFill>
-            <a:srgbClr val="FFFFFF"/>
-          </a:solidFill>
-          <a:ln w="12700">
-            <a:solidFill>
-              <a:srgbClr val="1F285A"/>
-            </a:solidFill>
-          </a:ln>
-          <a:effectLst/>
-        </p:spPr>
-        <p:style>
-          <a:lnRef idx="1">
-            <a:schemeClr val="accent1"/>
-          </a:lnRef>
-          <a:fillRef idx="3">
-            <a:schemeClr val="accent1"/>
-          </a:fillRef>
-          <a:effectRef idx="0">
-            <a:schemeClr val="accent1"/>
-          </a:effectRef>
-          <a:fontRef idx="minor">
-            <a:schemeClr val="lt1"/>
-          </a:fontRef>
-        </p:style>
-        <p:txBody>
-          <a:bodyPr rtlCol="0" anchor="ctr" wrap="square" lIns="36000" tIns="18000" rIns="36000" bIns="18000"/>
-          <a:lstStyle/>
-          <a:p>
-            <a:pPr algn="ctr">
-              <a:lnSpc>
-                <a:spcPct val="110000"/>
-              </a:lnSpc>
-              <a:spcAft>
-                <a:spcPts val="0"/>
-              </a:spcAft>
-            </a:pPr>
-            <a:r>
-              <a:rPr sz="1150" b="0">
-                <a:solidFill>
-                  <a:srgbClr val="333333"/>
-                </a:solidFill>
-                <a:latin typeface="メイリオ"/>
-                <a:ea typeface="メイリオ"/>
-                <a:cs typeface="メイリオ"/>
-              </a:rPr>
-              <a:t>銀座店</a:t>
-            </a:r>
-          </a:p>
-          <a:p>
-            <a:pPr algn="ctr">
-              <a:lnSpc>
-                <a:spcPct val="110000"/>
-              </a:lnSpc>
-              <a:spcAft>
-                <a:spcPts val="0"/>
-              </a:spcAft>
-            </a:pPr>
-            <a:r>
-              <a:rPr sz="1150" b="0">
-                <a:solidFill>
-                  <a:srgbClr val="333333"/>
-                </a:solidFill>
-                <a:latin typeface="メイリオ"/>
-                <a:ea typeface="メイリオ"/>
-                <a:cs typeface="メイリオ"/>
-              </a:rPr>
-              <a:t>Meta広告 30万円</a:t>
-            </a:r>
-          </a:p>
-        </p:txBody>
-      </p:sp>
-      <p:cxnSp>
-        <p:nvCxnSpPr>
-          <p:cNvPr id="25" name="Connector 24"/>
-          <p:cNvCxnSpPr/>
-          <p:nvPr/>
-        </p:nvCxnSpPr>
-        <p:spPr>
-          <a:xfrm>
-            <a:off x="3460799" y="5088600"/>
-            <a:ext cx="198000" cy="0"/>
-          </a:xfrm>
-          <a:prstGeom prst="line">
-            <a:avLst/>
-          </a:prstGeom>
-          <a:ln w="19050">
-            <a:solidFill>
-              <a:srgbClr val="1F285A"/>
-            </a:solidFill>
-            <a:tailEnd type="triangle" w="med" len="med"/>
-          </a:ln>
-        </p:spPr>
-        <p:style>
-          <a:lnRef idx="2">
-            <a:schemeClr val="accent1"/>
-          </a:lnRef>
-          <a:fillRef idx="0">
-            <a:schemeClr val="accent1"/>
-          </a:fillRef>
-          <a:effectRef idx="0">
-            <a:schemeClr val="accent1"/>
-          </a:effectRef>
-          <a:fontRef idx="minor">
-            <a:schemeClr val="tx1"/>
-          </a:fontRef>
-        </p:style>
-      </p:cxnSp>
-      <p:sp>
-        <p:nvSpPr>
-          <p:cNvPr id="26" name="Rectangle 25"/>
-          <p:cNvSpPr/>
-          <p:nvPr/>
-        </p:nvSpPr>
-        <p:spPr>
-          <a:xfrm>
-            <a:off x="3694799" y="4845600"/>
-            <a:ext cx="2654399" cy="486000"/>
-          </a:xfrm>
-          <a:prstGeom prst="rect">
-            <a:avLst/>
-          </a:prstGeom>
-          <a:solidFill>
-            <a:srgbClr val="FFFFFF"/>
-          </a:solidFill>
-          <a:ln w="12700">
-            <a:solidFill>
-              <a:srgbClr val="1F285A"/>
-            </a:solidFill>
-          </a:ln>
-          <a:effectLst/>
-        </p:spPr>
-        <p:style>
-          <a:lnRef idx="1">
-            <a:schemeClr val="accent1"/>
-          </a:lnRef>
-          <a:fillRef idx="3">
-            <a:schemeClr val="accent1"/>
-          </a:fillRef>
-          <a:effectRef idx="0">
-            <a:schemeClr val="accent1"/>
-          </a:effectRef>
-          <a:fontRef idx="minor">
-            <a:schemeClr val="lt1"/>
-          </a:fontRef>
-        </p:style>
-        <p:txBody>
-          <a:bodyPr rtlCol="0" anchor="ctr" wrap="square" lIns="36000" tIns="18000" rIns="36000" bIns="18000"/>
-          <a:lstStyle/>
-          <a:p>
-            <a:pPr algn="ctr">
-              <a:lnSpc>
-                <a:spcPct val="110000"/>
-              </a:lnSpc>
-              <a:spcAft>
-                <a:spcPts val="0"/>
-              </a:spcAft>
-            </a:pPr>
-            <a:r>
-              <a:rPr sz="1150" b="0">
-                <a:solidFill>
-                  <a:srgbClr val="333333"/>
-                </a:solidFill>
-                <a:latin typeface="メイリオ"/>
-                <a:ea typeface="メイリオ"/>
-                <a:cs typeface="メイリオ"/>
-              </a:rPr>
-              <a:t>Meta広告 20万円</a:t>
-            </a:r>
-          </a:p>
-          <a:p>
-            <a:pPr algn="ctr">
-              <a:lnSpc>
-                <a:spcPct val="110000"/>
-              </a:lnSpc>
-              <a:spcAft>
-                <a:spcPts val="0"/>
-              </a:spcAft>
-            </a:pPr>
-            <a:r>
-              <a:rPr sz="1150" b="0">
-                <a:solidFill>
-                  <a:srgbClr val="333333"/>
-                </a:solidFill>
-                <a:latin typeface="メイリオ"/>
-                <a:ea typeface="メイリオ"/>
-                <a:cs typeface="メイリオ"/>
-              </a:rPr>
-              <a:t>（出しすぎ分を削る）</a:t>
-            </a:r>
-          </a:p>
-        </p:txBody>
-      </p:sp>
-      <p:cxnSp>
-        <p:nvCxnSpPr>
-          <p:cNvPr id="27" name="Connector 26"/>
-          <p:cNvCxnSpPr/>
-          <p:nvPr/>
-        </p:nvCxnSpPr>
-        <p:spPr>
-          <a:xfrm>
-            <a:off x="6385199" y="5088600"/>
-            <a:ext cx="198000" cy="0"/>
-          </a:xfrm>
-          <a:prstGeom prst="line">
-            <a:avLst/>
-          </a:prstGeom>
-          <a:ln w="19050">
-            <a:solidFill>
-              <a:srgbClr val="1F285A"/>
-            </a:solidFill>
-            <a:tailEnd type="triangle" w="med" len="med"/>
-          </a:ln>
-        </p:spPr>
-        <p:style>
-          <a:lnRef idx="2">
-            <a:schemeClr val="accent1"/>
-          </a:lnRef>
-          <a:fillRef idx="0">
-            <a:schemeClr val="accent1"/>
-          </a:fillRef>
-          <a:effectRef idx="0">
-            <a:schemeClr val="accent1"/>
-          </a:effectRef>
-          <a:fontRef idx="minor">
-            <a:schemeClr val="tx1"/>
-          </a:fontRef>
-        </p:style>
-      </p:cxnSp>
-      <p:sp>
-        <p:nvSpPr>
-          <p:cNvPr id="28" name="Rectangle 27"/>
-          <p:cNvSpPr/>
-          <p:nvPr/>
-        </p:nvSpPr>
-        <p:spPr>
-          <a:xfrm>
-            <a:off x="6619199" y="4845600"/>
-            <a:ext cx="2654399" cy="486000"/>
-          </a:xfrm>
-          <a:prstGeom prst="rect">
-            <a:avLst/>
-          </a:prstGeom>
-          <a:solidFill>
-            <a:srgbClr val="1F285A"/>
-          </a:solidFill>
-          <a:ln w="12700">
-            <a:solidFill>
-              <a:srgbClr val="1F285A"/>
-            </a:solidFill>
-          </a:ln>
-          <a:effectLst/>
-        </p:spPr>
-        <p:style>
-          <a:lnRef idx="1">
-            <a:schemeClr val="accent1"/>
-          </a:lnRef>
-          <a:fillRef idx="3">
-            <a:schemeClr val="accent1"/>
-          </a:fillRef>
-          <a:effectRef idx="0">
-            <a:schemeClr val="accent1"/>
-          </a:effectRef>
-          <a:fontRef idx="minor">
-            <a:schemeClr val="lt1"/>
-          </a:fontRef>
-        </p:style>
-        <p:txBody>
-          <a:bodyPr rtlCol="0" anchor="ctr" wrap="square" lIns="36000" tIns="18000" rIns="36000" bIns="18000"/>
-          <a:lstStyle/>
-          <a:p>
-            <a:pPr algn="ctr">
-              <a:lnSpc>
-                <a:spcPct val="110000"/>
-              </a:lnSpc>
-              <a:spcAft>
-                <a:spcPts val="0"/>
-              </a:spcAft>
-            </a:pPr>
-            <a:r>
-              <a:rPr sz="1150" b="1">
-                <a:solidFill>
-                  <a:srgbClr val="FFFFFF"/>
-                </a:solidFill>
-                <a:latin typeface="メイリオ"/>
-                <a:ea typeface="メイリオ"/>
-                <a:cs typeface="メイリオ"/>
-              </a:rPr>
-              <a:t>LINE広告 10万円</a:t>
-            </a:r>
-          </a:p>
-          <a:p>
-            <a:pPr algn="ctr">
-              <a:lnSpc>
-                <a:spcPct val="110000"/>
-              </a:lnSpc>
-              <a:spcAft>
-                <a:spcPts val="0"/>
-              </a:spcAft>
-            </a:pPr>
-            <a:r>
-              <a:rPr sz="1150" b="1">
-                <a:solidFill>
-                  <a:srgbClr val="FFFFFF"/>
-                </a:solidFill>
-                <a:latin typeface="メイリオ"/>
-                <a:ea typeface="メイリオ"/>
-                <a:cs typeface="メイリオ"/>
-              </a:rPr>
-              <a:t>（削った分を回す）</a:t>
-            </a:r>
-          </a:p>
-        </p:txBody>
-      </p:sp>
-      <p:sp>
-        <p:nvSpPr>
-          <p:cNvPr id="29" name="TextBox 28"/>
-          <p:cNvSpPr txBox="1"/>
-          <p:nvPr/>
-        </p:nvSpPr>
-        <p:spPr>
-          <a:xfrm>
-            <a:off x="644400" y="5385600"/>
-            <a:ext cx="8629200" cy="216000"/>
-          </a:xfrm>
-          <a:prstGeom prst="rect">
-            <a:avLst/>
-          </a:prstGeom>
-          <a:noFill/>
-        </p:spPr>
-        <p:txBody>
-          <a:bodyPr wrap="square" anchor="t" lIns="36000" rIns="36000" tIns="10800" bIns="10800">
-            <a:spAutoFit/>
-          </a:bodyPr>
-          <a:lstStyle/>
-          <a:p>
-            <a:pPr algn="l">
-              <a:lnSpc>
-                <a:spcPct val="105000"/>
-              </a:lnSpc>
-              <a:spcAft>
-                <a:spcPts val="200"/>
-              </a:spcAft>
-            </a:pPr>
-            <a:r>
-              <a:rPr sz="1100" b="0">
-                <a:solidFill>
-                  <a:srgbClr val="7F7F7F"/>
-                </a:solidFill>
-                <a:latin typeface="メイリオ"/>
-                <a:ea typeface="メイリオ"/>
-                <a:cs typeface="メイリオ"/>
-              </a:rPr>
-              <a:t>出しすぎている店舗だけが対象。店舗ごとの総額は変わらない</a:t>
             </a:r>
           </a:p>
         </p:txBody>

--- a/20261013_展示会LINE運用方針_予算枠のご提案.pptx
+++ b/20261013_展示会LINE運用方針_予算枠のご提案.pptx
@@ -4112,7 +4112,7 @@
                 <a:ea typeface="メイリオ"/>
                 <a:cs typeface="メイリオ"/>
               </a:rPr>
-              <a:t>10万円</a:t>
+              <a:t>30万円</a:t>
             </a:r>
           </a:p>
           <a:p>
@@ -4262,7 +4262,7 @@
                 <a:ea typeface="メイリオ"/>
                 <a:cs typeface="メイリオ"/>
               </a:rPr>
-              <a:t>2万円</a:t>
+              <a:t>6万円</a:t>
             </a:r>
           </a:p>
           <a:p>
@@ -4412,7 +4412,7 @@
                 <a:ea typeface="メイリオ"/>
                 <a:cs typeface="メイリオ"/>
               </a:rPr>
-              <a:t>12万円</a:t>
+              <a:t>36万円</a:t>
             </a:r>
           </a:p>
         </p:txBody>
@@ -4544,7 +4544,7 @@
                 <a:ea typeface="メイリオ"/>
                 <a:cs typeface="メイリオ"/>
               </a:rPr>
-              <a:t>配信</a:t>
+              <a:t>金額</a:t>
             </a:r>
           </a:p>
         </p:txBody>
@@ -4588,7 +4588,7 @@
                 <a:ea typeface="メイリオ"/>
                 <a:cs typeface="メイリオ"/>
               </a:rPr>
-              <a:t>LINE広告は1つのアカウントで、展示会を開く全エリアに配信できる</a:t>
+              <a:t>1店舗分のMeta予算と同じ30万円で、全店舗のエリアに配信</a:t>
             </a:r>
           </a:p>
         </p:txBody>
@@ -4632,7 +4632,7 @@
                 <a:ea typeface="メイリオ"/>
                 <a:cs typeface="メイリオ"/>
               </a:rPr>
-              <a:t>配分</a:t>
+              <a:t>配信</a:t>
             </a:r>
           </a:p>
         </p:txBody>
@@ -4676,7 +4676,7 @@
                 <a:ea typeface="メイリオ"/>
                 <a:cs typeface="メイリオ"/>
               </a:rPr>
-              <a:t>予約の取れるエリアに、広告費を寄せて調整する</a:t>
+              <a:t>LINE広告は1つのアカウントで、展示会を開く全エリアに配信できる</a:t>
             </a:r>
           </a:p>
         </p:txBody>
@@ -4720,7 +4720,7 @@
                 <a:ea typeface="メイリオ"/>
                 <a:cs typeface="メイリオ"/>
               </a:rPr>
-              <a:t>LINE広告</a:t>
+              <a:t>配分</a:t>
             </a:r>
           </a:p>
         </p:txBody>
@@ -4764,7 +4764,7 @@
                 <a:ea typeface="メイリオ"/>
                 <a:cs typeface="メイリオ"/>
               </a:rPr>
-              <a:t>Metaとは別の媒体。国内の月間利用者数 1億人以上（LINEヤフー公表）</a:t>
+              <a:t>予約の取れるエリアに、広告費を寄せて調整する</a:t>
             </a:r>
           </a:p>
         </p:txBody>
@@ -4777,8 +4777,8 @@
         </p:nvSpPr>
         <p:spPr>
           <a:xfrm>
-            <a:off x="644400" y="4215600"/>
-            <a:ext cx="8629200" cy="216000"/>
+            <a:off x="770400" y="4089600"/>
+            <a:ext cx="1655999" cy="259200"/>
           </a:xfrm>
           <a:prstGeom prst="rect">
             <a:avLst/>
@@ -4800,6 +4800,94 @@
               </a:spcAft>
             </a:pPr>
             <a:r>
+              <a:rPr sz="1300" b="1">
+                <a:solidFill>
+                  <a:srgbClr val="333333"/>
+                </a:solidFill>
+                <a:latin typeface="メイリオ"/>
+                <a:ea typeface="メイリオ"/>
+                <a:cs typeface="メイリオ"/>
+              </a:rPr>
+              <a:t>LINE広告</a:t>
+            </a:r>
+          </a:p>
+        </p:txBody>
+      </p:sp>
+      <p:sp>
+        <p:nvSpPr>
+          <p:cNvPr id="22" name="TextBox 21"/>
+          <p:cNvSpPr txBox="1"/>
+          <p:nvPr/>
+        </p:nvSpPr>
+        <p:spPr>
+          <a:xfrm>
+            <a:off x="2426400" y="4089600"/>
+            <a:ext cx="6847199" cy="259200"/>
+          </a:xfrm>
+          <a:prstGeom prst="rect">
+            <a:avLst/>
+          </a:prstGeom>
+          <a:noFill/>
+        </p:spPr>
+        <p:txBody>
+          <a:bodyPr wrap="square" anchor="t" lIns="36000" rIns="36000" tIns="10800" bIns="10800">
+            <a:spAutoFit/>
+          </a:bodyPr>
+          <a:lstStyle/>
+          <a:p>
+            <a:pPr algn="l">
+              <a:lnSpc>
+                <a:spcPct val="105000"/>
+              </a:lnSpc>
+              <a:spcAft>
+                <a:spcPts val="200"/>
+              </a:spcAft>
+            </a:pPr>
+            <a:r>
+              <a:rPr sz="1300" b="0">
+                <a:solidFill>
+                  <a:srgbClr val="333333"/>
+                </a:solidFill>
+                <a:latin typeface="メイリオ"/>
+                <a:ea typeface="メイリオ"/>
+                <a:cs typeface="メイリオ"/>
+              </a:rPr>
+              <a:t>Metaとは別の媒体。国内の月間利用者数 1億人以上（LINEヤフー公表）</a:t>
+            </a:r>
+          </a:p>
+        </p:txBody>
+      </p:sp>
+      <p:sp>
+        <p:nvSpPr>
+          <p:cNvPr id="23" name="TextBox 22"/>
+          <p:cNvSpPr txBox="1"/>
+          <p:nvPr/>
+        </p:nvSpPr>
+        <p:spPr>
+          <a:xfrm>
+            <a:off x="644400" y="4474799"/>
+            <a:ext cx="8629200" cy="216000"/>
+          </a:xfrm>
+          <a:prstGeom prst="rect">
+            <a:avLst/>
+          </a:prstGeom>
+          <a:noFill/>
+        </p:spPr>
+        <p:txBody>
+          <a:bodyPr wrap="square" anchor="t" lIns="36000" rIns="36000" tIns="10800" bIns="10800">
+            <a:spAutoFit/>
+          </a:bodyPr>
+          <a:lstStyle/>
+          <a:p>
+            <a:pPr algn="l">
+              <a:lnSpc>
+                <a:spcPct val="105000"/>
+              </a:lnSpc>
+              <a:spcAft>
+                <a:spcPts val="200"/>
+              </a:spcAft>
+            </a:pPr>
+            <a:r>
               <a:rPr sz="1100" b="0">
                 <a:solidFill>
                   <a:srgbClr val="7F7F7F"/>
@@ -4808,7 +4896,7 @@
                 <a:ea typeface="メイリオ"/>
                 <a:cs typeface="メイリオ"/>
               </a:rPr>
-              <a:t>仮に月10万円 → クリック1,000（CPC 100円）→ 予約10件（予約率1.0%）→ 予約1件あたりの広告費 10,000円</a:t>
+              <a:t>仮に月30万円 → クリック3,000（CPC 100円）→ 予約30件（予約率1.0%）→ 予約1件あたりの広告費 10,000円</a:t>
             </a:r>
           </a:p>
         </p:txBody>

--- a/20261013_展示会LINE運用方針_予算枠のご提案.pptx
+++ b/20261013_展示会LINE運用方針_予算枠のご提案.pptx
@@ -4041,7 +4041,7 @@
         <p:spPr>
           <a:xfrm>
             <a:off x="770400" y="1961999"/>
-            <a:ext cx="2546400" cy="827999"/>
+            <a:ext cx="1882799" cy="827999"/>
           </a:xfrm>
           <a:prstGeom prst="rect">
             <a:avLst/>
@@ -4091,7 +4091,7 @@
                 <a:ea typeface="メイリオ"/>
                 <a:cs typeface="メイリオ"/>
               </a:rPr>
-              <a:t>LINE広告の広告費</a:t>
+              <a:t>LINE広告（通常）</a:t>
             </a:r>
           </a:p>
           <a:p>
@@ -4112,7 +4112,7 @@
                 <a:ea typeface="メイリオ"/>
                 <a:cs typeface="メイリオ"/>
               </a:rPr>
-              <a:t>30万円</a:t>
+              <a:t>20万円</a:t>
             </a:r>
           </a:p>
           <a:p>
@@ -4133,7 +4133,7 @@
                 <a:ea typeface="メイリオ"/>
                 <a:cs typeface="メイリオ"/>
               </a:rPr>
-              <a:t>全店舗の合計</a:t>
+              <a:t>予約を取る</a:t>
             </a:r>
           </a:p>
         </p:txBody>
@@ -4146,8 +4146,8 @@
         </p:nvSpPr>
         <p:spPr>
           <a:xfrm>
-            <a:off x="3316800" y="2196000"/>
-            <a:ext cx="432000" cy="360000"/>
+            <a:off x="2653199" y="2196000"/>
+            <a:ext cx="324000" cy="360000"/>
           </a:xfrm>
           <a:prstGeom prst="rect">
             <a:avLst/>
@@ -4190,8 +4190,8 @@
         </p:nvSpPr>
         <p:spPr>
           <a:xfrm>
-            <a:off x="3748800" y="1961999"/>
-            <a:ext cx="2546400" cy="827999"/>
+            <a:off x="2977200" y="1961999"/>
+            <a:ext cx="1882799" cy="827999"/>
           </a:xfrm>
           <a:prstGeom prst="rect">
             <a:avLst/>
@@ -4241,7 +4241,7 @@
                 <a:ea typeface="メイリオ"/>
                 <a:cs typeface="メイリオ"/>
               </a:rPr>
-              <a:t>運用手数料</a:t>
+              <a:t>LINE広告（CPF）</a:t>
             </a:r>
           </a:p>
           <a:p>
@@ -4262,7 +4262,7 @@
                 <a:ea typeface="メイリオ"/>
                 <a:cs typeface="メイリオ"/>
               </a:rPr>
-              <a:t>6万円</a:t>
+              <a:t>10万円</a:t>
             </a:r>
           </a:p>
           <a:p>
@@ -4283,7 +4283,7 @@
                 <a:ea typeface="メイリオ"/>
                 <a:cs typeface="メイリオ"/>
               </a:rPr>
-              <a:t>広告費の20%</a:t>
+              <a:t>見込みの方を友だちに</a:t>
             </a:r>
           </a:p>
         </p:txBody>
@@ -4296,8 +4296,8 @@
         </p:nvSpPr>
         <p:spPr>
           <a:xfrm>
-            <a:off x="6295200" y="2196000"/>
-            <a:ext cx="432000" cy="360000"/>
+            <a:off x="4860000" y="2196000"/>
+            <a:ext cx="324000" cy="360000"/>
           </a:xfrm>
           <a:prstGeom prst="rect">
             <a:avLst/>
@@ -4327,7 +4327,7 @@
                 <a:ea typeface="メイリオ"/>
                 <a:cs typeface="メイリオ"/>
               </a:rPr>
-              <a:t>＝</a:t>
+              <a:t>＋</a:t>
             </a:r>
           </a:p>
         </p:txBody>
@@ -4340,14 +4340,14 @@
         </p:nvSpPr>
         <p:spPr>
           <a:xfrm>
-            <a:off x="6727200" y="1961999"/>
-            <a:ext cx="2546400" cy="827999"/>
-          </a:xfrm>
-          <a:prstGeom prst="rect">
-            <a:avLst/>
-          </a:prstGeom>
-          <a:solidFill>
-            <a:srgbClr val="1F285A"/>
+            <a:off x="5184000" y="1961999"/>
+            <a:ext cx="1882799" cy="827999"/>
+          </a:xfrm>
+          <a:prstGeom prst="rect">
+            <a:avLst/>
+          </a:prstGeom>
+          <a:solidFill>
+            <a:srgbClr val="F4F7FF"/>
           </a:solidFill>
           <a:ln w="12700">
             <a:solidFill>
@@ -4385,13 +4385,13 @@
             <a:r>
               <a:rPr sz="1200" b="1">
                 <a:solidFill>
-                  <a:srgbClr val="FFFFFF"/>
-                </a:solidFill>
-                <a:latin typeface="メイリオ"/>
-                <a:ea typeface="メイリオ"/>
-                <a:cs typeface="メイリオ"/>
-              </a:rPr>
-              <a:t>合計</a:t>
+                  <a:srgbClr val="1F285A"/>
+                </a:solidFill>
+                <a:latin typeface="メイリオ"/>
+                <a:ea typeface="メイリオ"/>
+                <a:cs typeface="メイリオ"/>
+              </a:rPr>
+              <a:t>運用手数料</a:t>
             </a:r>
           </a:p>
           <a:p>
@@ -4406,71 +4406,48 @@
             <a:r>
               <a:rPr sz="2200" b="1">
                 <a:solidFill>
-                  <a:srgbClr val="FFFFFF"/>
-                </a:solidFill>
-                <a:latin typeface="メイリオ"/>
-                <a:ea typeface="メイリオ"/>
-                <a:cs typeface="メイリオ"/>
-              </a:rPr>
-              <a:t>36万円</a:t>
-            </a:r>
-          </a:p>
-        </p:txBody>
-      </p:sp>
-      <p:sp>
-        <p:nvSpPr>
-          <p:cNvPr id="13" name="Rectangle 12"/>
-          <p:cNvSpPr/>
-          <p:nvPr/>
-        </p:nvSpPr>
-        <p:spPr>
-          <a:xfrm>
-            <a:off x="644400" y="3056400"/>
-            <a:ext cx="54000" cy="180000"/>
-          </a:xfrm>
-          <a:prstGeom prst="rect">
-            <a:avLst/>
-          </a:prstGeom>
-          <a:solidFill>
-            <a:srgbClr val="1F285A"/>
-          </a:solidFill>
-          <a:ln>
-            <a:noFill/>
-          </a:ln>
-          <a:effectLst/>
-        </p:spPr>
-        <p:style>
-          <a:lnRef idx="1">
-            <a:schemeClr val="accent1"/>
-          </a:lnRef>
-          <a:fillRef idx="3">
-            <a:schemeClr val="accent1"/>
-          </a:fillRef>
-          <a:effectRef idx="0">
-            <a:schemeClr val="accent1"/>
-          </a:effectRef>
-          <a:fontRef idx="minor">
-            <a:schemeClr val="lt1"/>
-          </a:fontRef>
-        </p:style>
-        <p:txBody>
-          <a:bodyPr rtlCol="0" anchor="ctr" wrap="square" lIns="72000" tIns="18000" rIns="72000" bIns="18000"/>
-          <a:lstStyle/>
-          <a:p>
-            <a:pPr algn="ctr"/>
-          </a:p>
-        </p:txBody>
-      </p:sp>
-      <p:sp>
-        <p:nvSpPr>
-          <p:cNvPr id="14" name="TextBox 13"/>
+                  <a:srgbClr val="1F285A"/>
+                </a:solidFill>
+                <a:latin typeface="メイリオ"/>
+                <a:ea typeface="メイリオ"/>
+                <a:cs typeface="メイリオ"/>
+              </a:rPr>
+              <a:t>6万円</a:t>
+            </a:r>
+          </a:p>
+          <a:p>
+            <a:pPr algn="ctr">
+              <a:lnSpc>
+                <a:spcPct val="110000"/>
+              </a:lnSpc>
+              <a:spcAft>
+                <a:spcPts val="0"/>
+              </a:spcAft>
+            </a:pPr>
+            <a:r>
+              <a:rPr sz="1100" b="0">
+                <a:solidFill>
+                  <a:srgbClr val="7F7F7F"/>
+                </a:solidFill>
+                <a:latin typeface="メイリオ"/>
+                <a:ea typeface="メイリオ"/>
+                <a:cs typeface="メイリオ"/>
+              </a:rPr>
+              <a:t>広告費の20%</a:t>
+            </a:r>
+          </a:p>
+        </p:txBody>
+      </p:sp>
+      <p:sp>
+        <p:nvSpPr>
+          <p:cNvPr id="13" name="TextBox 12"/>
           <p:cNvSpPr txBox="1"/>
           <p:nvPr/>
         </p:nvSpPr>
         <p:spPr>
           <a:xfrm>
-            <a:off x="770400" y="3006000"/>
-            <a:ext cx="8503200" cy="288000"/>
+            <a:off x="7066800" y="2196000"/>
+            <a:ext cx="324000" cy="360000"/>
           </a:xfrm>
           <a:prstGeom prst="rect">
             <a:avLst/>
@@ -4492,7 +4469,7 @@
               </a:spcAft>
             </a:pPr>
             <a:r>
-              <a:rPr sz="1350" b="1">
+              <a:rPr sz="2200" b="1">
                 <a:solidFill>
                   <a:srgbClr val="1F285A"/>
                 </a:solidFill>
@@ -4500,21 +4477,150 @@
                 <a:ea typeface="メイリオ"/>
                 <a:cs typeface="メイリオ"/>
               </a:rPr>
-              <a:t>店舗ごとに積まない理由</a:t>
-            </a:r>
-          </a:p>
-        </p:txBody>
-      </p:sp>
-      <p:sp>
-        <p:nvSpPr>
-          <p:cNvPr id="15" name="TextBox 14"/>
+              <a:t>＝</a:t>
+            </a:r>
+          </a:p>
+        </p:txBody>
+      </p:sp>
+      <p:sp>
+        <p:nvSpPr>
+          <p:cNvPr id="14" name="Rectangle 13"/>
+          <p:cNvSpPr/>
+          <p:nvPr/>
+        </p:nvSpPr>
+        <p:spPr>
+          <a:xfrm>
+            <a:off x="7390800" y="1961999"/>
+            <a:ext cx="1882799" cy="827999"/>
+          </a:xfrm>
+          <a:prstGeom prst="rect">
+            <a:avLst/>
+          </a:prstGeom>
+          <a:solidFill>
+            <a:srgbClr val="1F285A"/>
+          </a:solidFill>
+          <a:ln w="12700">
+            <a:solidFill>
+              <a:srgbClr val="1F285A"/>
+            </a:solidFill>
+          </a:ln>
+          <a:effectLst/>
+        </p:spPr>
+        <p:style>
+          <a:lnRef idx="1">
+            <a:schemeClr val="accent1"/>
+          </a:lnRef>
+          <a:fillRef idx="3">
+            <a:schemeClr val="accent1"/>
+          </a:fillRef>
+          <a:effectRef idx="0">
+            <a:schemeClr val="accent1"/>
+          </a:effectRef>
+          <a:fontRef idx="minor">
+            <a:schemeClr val="lt1"/>
+          </a:fontRef>
+        </p:style>
+        <p:txBody>
+          <a:bodyPr rtlCol="0" anchor="ctr" wrap="square" lIns="36000" tIns="18000" rIns="36000" bIns="18000"/>
+          <a:lstStyle/>
+          <a:p>
+            <a:pPr algn="ctr">
+              <a:lnSpc>
+                <a:spcPct val="110000"/>
+              </a:lnSpc>
+              <a:spcAft>
+                <a:spcPts val="200"/>
+              </a:spcAft>
+            </a:pPr>
+            <a:r>
+              <a:rPr sz="1200" b="1">
+                <a:solidFill>
+                  <a:srgbClr val="FFFFFF"/>
+                </a:solidFill>
+                <a:latin typeface="メイリオ"/>
+                <a:ea typeface="メイリオ"/>
+                <a:cs typeface="メイリオ"/>
+              </a:rPr>
+              <a:t>合計</a:t>
+            </a:r>
+          </a:p>
+          <a:p>
+            <a:pPr algn="ctr">
+              <a:lnSpc>
+                <a:spcPct val="110000"/>
+              </a:lnSpc>
+              <a:spcAft>
+                <a:spcPts val="200"/>
+              </a:spcAft>
+            </a:pPr>
+            <a:r>
+              <a:rPr sz="2200" b="1">
+                <a:solidFill>
+                  <a:srgbClr val="FFFFFF"/>
+                </a:solidFill>
+                <a:latin typeface="メイリオ"/>
+                <a:ea typeface="メイリオ"/>
+                <a:cs typeface="メイリオ"/>
+              </a:rPr>
+              <a:t>36万円</a:t>
+            </a:r>
+          </a:p>
+        </p:txBody>
+      </p:sp>
+      <p:sp>
+        <p:nvSpPr>
+          <p:cNvPr id="15" name="Rectangle 14"/>
+          <p:cNvSpPr/>
+          <p:nvPr/>
+        </p:nvSpPr>
+        <p:spPr>
+          <a:xfrm>
+            <a:off x="644400" y="3056400"/>
+            <a:ext cx="54000" cy="180000"/>
+          </a:xfrm>
+          <a:prstGeom prst="rect">
+            <a:avLst/>
+          </a:prstGeom>
+          <a:solidFill>
+            <a:srgbClr val="1F285A"/>
+          </a:solidFill>
+          <a:ln>
+            <a:noFill/>
+          </a:ln>
+          <a:effectLst/>
+        </p:spPr>
+        <p:style>
+          <a:lnRef idx="1">
+            <a:schemeClr val="accent1"/>
+          </a:lnRef>
+          <a:fillRef idx="3">
+            <a:schemeClr val="accent1"/>
+          </a:fillRef>
+          <a:effectRef idx="0">
+            <a:schemeClr val="accent1"/>
+          </a:effectRef>
+          <a:fontRef idx="minor">
+            <a:schemeClr val="lt1"/>
+          </a:fontRef>
+        </p:style>
+        <p:txBody>
+          <a:bodyPr rtlCol="0" anchor="ctr" wrap="square" lIns="72000" tIns="18000" rIns="72000" bIns="18000"/>
+          <a:lstStyle/>
+          <a:p>
+            <a:pPr algn="ctr"/>
+          </a:p>
+        </p:txBody>
+      </p:sp>
+      <p:sp>
+        <p:nvSpPr>
+          <p:cNvPr id="16" name="TextBox 15"/>
           <p:cNvSpPr txBox="1"/>
           <p:nvPr/>
         </p:nvSpPr>
         <p:spPr>
           <a:xfrm>
-            <a:off x="770400" y="3311999"/>
-            <a:ext cx="1655999" cy="259200"/>
+            <a:off x="770400" y="3006000"/>
+            <a:ext cx="8503200" cy="288000"/>
           </a:xfrm>
           <a:prstGeom prst="rect">
             <a:avLst/>
@@ -4536,29 +4642,29 @@
               </a:spcAft>
             </a:pPr>
             <a:r>
-              <a:rPr sz="1300" b="1">
-                <a:solidFill>
-                  <a:srgbClr val="333333"/>
-                </a:solidFill>
-                <a:latin typeface="メイリオ"/>
-                <a:ea typeface="メイリオ"/>
-                <a:cs typeface="メイリオ"/>
-              </a:rPr>
-              <a:t>金額</a:t>
-            </a:r>
-          </a:p>
-        </p:txBody>
-      </p:sp>
-      <p:sp>
-        <p:nvSpPr>
-          <p:cNvPr id="16" name="TextBox 15"/>
+              <a:rPr sz="1350" b="1">
+                <a:solidFill>
+                  <a:srgbClr val="1F285A"/>
+                </a:solidFill>
+                <a:latin typeface="メイリオ"/>
+                <a:ea typeface="メイリオ"/>
+                <a:cs typeface="メイリオ"/>
+              </a:rPr>
+              <a:t>店舗ごとに積まない理由</a:t>
+            </a:r>
+          </a:p>
+        </p:txBody>
+      </p:sp>
+      <p:sp>
+        <p:nvSpPr>
+          <p:cNvPr id="17" name="TextBox 16"/>
           <p:cNvSpPr txBox="1"/>
           <p:nvPr/>
         </p:nvSpPr>
         <p:spPr>
           <a:xfrm>
-            <a:off x="2426400" y="3311999"/>
-            <a:ext cx="6847199" cy="259200"/>
+            <a:off x="770400" y="3311999"/>
+            <a:ext cx="1655999" cy="259200"/>
           </a:xfrm>
           <a:prstGeom prst="rect">
             <a:avLst/>
@@ -4580,7 +4686,7 @@
               </a:spcAft>
             </a:pPr>
             <a:r>
-              <a:rPr sz="1300" b="0">
+              <a:rPr sz="1300" b="1">
                 <a:solidFill>
                   <a:srgbClr val="333333"/>
                 </a:solidFill>
@@ -4588,21 +4694,21 @@
                 <a:ea typeface="メイリオ"/>
                 <a:cs typeface="メイリオ"/>
               </a:rPr>
-              <a:t>1店舗分のMeta予算と同じ30万円で、全店舗のエリアに配信</a:t>
-            </a:r>
-          </a:p>
-        </p:txBody>
-      </p:sp>
-      <p:sp>
-        <p:nvSpPr>
-          <p:cNvPr id="17" name="TextBox 16"/>
+              <a:t>金額</a:t>
+            </a:r>
+          </a:p>
+        </p:txBody>
+      </p:sp>
+      <p:sp>
+        <p:nvSpPr>
+          <p:cNvPr id="18" name="TextBox 17"/>
           <p:cNvSpPr txBox="1"/>
           <p:nvPr/>
         </p:nvSpPr>
         <p:spPr>
           <a:xfrm>
-            <a:off x="770400" y="3571200"/>
-            <a:ext cx="1655999" cy="259200"/>
+            <a:off x="2426400" y="3311999"/>
+            <a:ext cx="6847199" cy="259200"/>
           </a:xfrm>
           <a:prstGeom prst="rect">
             <a:avLst/>
@@ -4624,7 +4730,7 @@
               </a:spcAft>
             </a:pPr>
             <a:r>
-              <a:rPr sz="1300" b="1">
+              <a:rPr sz="1300" b="0">
                 <a:solidFill>
                   <a:srgbClr val="333333"/>
                 </a:solidFill>
@@ -4632,21 +4738,21 @@
                 <a:ea typeface="メイリオ"/>
                 <a:cs typeface="メイリオ"/>
               </a:rPr>
-              <a:t>配信</a:t>
-            </a:r>
-          </a:p>
-        </p:txBody>
-      </p:sp>
-      <p:sp>
-        <p:nvSpPr>
-          <p:cNvPr id="18" name="TextBox 17"/>
+              <a:t>1店舗分のMeta予算と同じ30万円で、全店舗のエリアに配信</a:t>
+            </a:r>
+          </a:p>
+        </p:txBody>
+      </p:sp>
+      <p:sp>
+        <p:nvSpPr>
+          <p:cNvPr id="19" name="TextBox 18"/>
           <p:cNvSpPr txBox="1"/>
           <p:nvPr/>
         </p:nvSpPr>
         <p:spPr>
           <a:xfrm>
-            <a:off x="2426400" y="3571200"/>
-            <a:ext cx="6847199" cy="259200"/>
+            <a:off x="770400" y="3571200"/>
+            <a:ext cx="1655999" cy="259200"/>
           </a:xfrm>
           <a:prstGeom prst="rect">
             <a:avLst/>
@@ -4668,7 +4774,7 @@
               </a:spcAft>
             </a:pPr>
             <a:r>
-              <a:rPr sz="1300" b="0">
+              <a:rPr sz="1300" b="1">
                 <a:solidFill>
                   <a:srgbClr val="333333"/>
                 </a:solidFill>
@@ -4676,21 +4782,21 @@
                 <a:ea typeface="メイリオ"/>
                 <a:cs typeface="メイリオ"/>
               </a:rPr>
-              <a:t>LINE広告は1つのアカウントで、展示会を開く全エリアに配信できる</a:t>
-            </a:r>
-          </a:p>
-        </p:txBody>
-      </p:sp>
-      <p:sp>
-        <p:nvSpPr>
-          <p:cNvPr id="19" name="TextBox 18"/>
+              <a:t>配信</a:t>
+            </a:r>
+          </a:p>
+        </p:txBody>
+      </p:sp>
+      <p:sp>
+        <p:nvSpPr>
+          <p:cNvPr id="20" name="TextBox 19"/>
           <p:cNvSpPr txBox="1"/>
           <p:nvPr/>
         </p:nvSpPr>
         <p:spPr>
           <a:xfrm>
-            <a:off x="770400" y="3830399"/>
-            <a:ext cx="1655999" cy="259200"/>
+            <a:off x="2426400" y="3571200"/>
+            <a:ext cx="6847199" cy="259200"/>
           </a:xfrm>
           <a:prstGeom prst="rect">
             <a:avLst/>
@@ -4712,7 +4818,7 @@
               </a:spcAft>
             </a:pPr>
             <a:r>
-              <a:rPr sz="1300" b="1">
+              <a:rPr sz="1300" b="0">
                 <a:solidFill>
                   <a:srgbClr val="333333"/>
                 </a:solidFill>
@@ -4720,21 +4826,21 @@
                 <a:ea typeface="メイリオ"/>
                 <a:cs typeface="メイリオ"/>
               </a:rPr>
-              <a:t>配分</a:t>
-            </a:r>
-          </a:p>
-        </p:txBody>
-      </p:sp>
-      <p:sp>
-        <p:nvSpPr>
-          <p:cNvPr id="20" name="TextBox 19"/>
+              <a:t>LINE広告は1つのアカウントで、展示会を開く全エリアに配信できる</a:t>
+            </a:r>
+          </a:p>
+        </p:txBody>
+      </p:sp>
+      <p:sp>
+        <p:nvSpPr>
+          <p:cNvPr id="21" name="TextBox 20"/>
           <p:cNvSpPr txBox="1"/>
           <p:nvPr/>
         </p:nvSpPr>
         <p:spPr>
           <a:xfrm>
-            <a:off x="2426400" y="3830399"/>
-            <a:ext cx="6847199" cy="259200"/>
+            <a:off x="770400" y="3830399"/>
+            <a:ext cx="1655999" cy="259200"/>
           </a:xfrm>
           <a:prstGeom prst="rect">
             <a:avLst/>
@@ -4756,7 +4862,7 @@
               </a:spcAft>
             </a:pPr>
             <a:r>
-              <a:rPr sz="1300" b="0">
+              <a:rPr sz="1300" b="1">
                 <a:solidFill>
                   <a:srgbClr val="333333"/>
                 </a:solidFill>
@@ -4764,21 +4870,21 @@
                 <a:ea typeface="メイリオ"/>
                 <a:cs typeface="メイリオ"/>
               </a:rPr>
-              <a:t>予約の取れるエリアに、広告費を寄せて調整する</a:t>
-            </a:r>
-          </a:p>
-        </p:txBody>
-      </p:sp>
-      <p:sp>
-        <p:nvSpPr>
-          <p:cNvPr id="21" name="TextBox 20"/>
+              <a:t>配分</a:t>
+            </a:r>
+          </a:p>
+        </p:txBody>
+      </p:sp>
+      <p:sp>
+        <p:nvSpPr>
+          <p:cNvPr id="22" name="TextBox 21"/>
           <p:cNvSpPr txBox="1"/>
           <p:nvPr/>
         </p:nvSpPr>
         <p:spPr>
           <a:xfrm>
-            <a:off x="770400" y="4089600"/>
-            <a:ext cx="1655999" cy="259200"/>
+            <a:off x="2426400" y="3830399"/>
+            <a:ext cx="6847199" cy="259200"/>
           </a:xfrm>
           <a:prstGeom prst="rect">
             <a:avLst/>
@@ -4800,7 +4906,7 @@
               </a:spcAft>
             </a:pPr>
             <a:r>
-              <a:rPr sz="1300" b="1">
+              <a:rPr sz="1300" b="0">
                 <a:solidFill>
                   <a:srgbClr val="333333"/>
                 </a:solidFill>
@@ -4808,21 +4914,21 @@
                 <a:ea typeface="メイリオ"/>
                 <a:cs typeface="メイリオ"/>
               </a:rPr>
-              <a:t>LINE広告</a:t>
-            </a:r>
-          </a:p>
-        </p:txBody>
-      </p:sp>
-      <p:sp>
-        <p:nvSpPr>
-          <p:cNvPr id="22" name="TextBox 21"/>
+              <a:t>予約の取れるエリアに、広告費を寄せて調整する</a:t>
+            </a:r>
+          </a:p>
+        </p:txBody>
+      </p:sp>
+      <p:sp>
+        <p:nvSpPr>
+          <p:cNvPr id="23" name="TextBox 22"/>
           <p:cNvSpPr txBox="1"/>
           <p:nvPr/>
         </p:nvSpPr>
         <p:spPr>
           <a:xfrm>
-            <a:off x="2426400" y="4089600"/>
-            <a:ext cx="6847199" cy="259200"/>
+            <a:off x="770400" y="4089600"/>
+            <a:ext cx="1655999" cy="259200"/>
           </a:xfrm>
           <a:prstGeom prst="rect">
             <a:avLst/>
@@ -4844,7 +4950,7 @@
               </a:spcAft>
             </a:pPr>
             <a:r>
-              <a:rPr sz="1300" b="0">
+              <a:rPr sz="1300" b="1">
                 <a:solidFill>
                   <a:srgbClr val="333333"/>
                 </a:solidFill>
@@ -4852,21 +4958,21 @@
                 <a:ea typeface="メイリオ"/>
                 <a:cs typeface="メイリオ"/>
               </a:rPr>
-              <a:t>Metaとは別の媒体。国内の月間利用者数 1億人以上（LINEヤフー公表）</a:t>
-            </a:r>
-          </a:p>
-        </p:txBody>
-      </p:sp>
-      <p:sp>
-        <p:nvSpPr>
-          <p:cNvPr id="23" name="TextBox 22"/>
+              <a:t>LINE広告</a:t>
+            </a:r>
+          </a:p>
+        </p:txBody>
+      </p:sp>
+      <p:sp>
+        <p:nvSpPr>
+          <p:cNvPr id="24" name="TextBox 23"/>
           <p:cNvSpPr txBox="1"/>
           <p:nvPr/>
         </p:nvSpPr>
         <p:spPr>
           <a:xfrm>
-            <a:off x="644400" y="4474799"/>
-            <a:ext cx="8629200" cy="216000"/>
+            <a:off x="2426400" y="4089600"/>
+            <a:ext cx="6847199" cy="259200"/>
           </a:xfrm>
           <a:prstGeom prst="rect">
             <a:avLst/>
@@ -4888,6 +4994,50 @@
               </a:spcAft>
             </a:pPr>
             <a:r>
+              <a:rPr sz="1300" b="0">
+                <a:solidFill>
+                  <a:srgbClr val="333333"/>
+                </a:solidFill>
+                <a:latin typeface="メイリオ"/>
+                <a:ea typeface="メイリオ"/>
+                <a:cs typeface="メイリオ"/>
+              </a:rPr>
+              <a:t>Metaとは別の媒体。国内の月間利用者数 1億人以上（LINEヤフー公表）</a:t>
+            </a:r>
+          </a:p>
+        </p:txBody>
+      </p:sp>
+      <p:sp>
+        <p:nvSpPr>
+          <p:cNvPr id="25" name="TextBox 24"/>
+          <p:cNvSpPr txBox="1"/>
+          <p:nvPr/>
+        </p:nvSpPr>
+        <p:spPr>
+          <a:xfrm>
+            <a:off x="644400" y="4474799"/>
+            <a:ext cx="8629200" cy="360000"/>
+          </a:xfrm>
+          <a:prstGeom prst="rect">
+            <a:avLst/>
+          </a:prstGeom>
+          <a:noFill/>
+        </p:spPr>
+        <p:txBody>
+          <a:bodyPr wrap="square" anchor="t" lIns="36000" rIns="36000" tIns="10800" bIns="10800">
+            <a:spAutoFit/>
+          </a:bodyPr>
+          <a:lstStyle/>
+          <a:p>
+            <a:pPr algn="l">
+              <a:lnSpc>
+                <a:spcPct val="105000"/>
+              </a:lnSpc>
+              <a:spcAft>
+                <a:spcPts val="200"/>
+              </a:spcAft>
+            </a:pPr>
+            <a:r>
               <a:rPr sz="1100" b="0">
                 <a:solidFill>
                   <a:srgbClr val="7F7F7F"/>
@@ -4896,7 +5046,28 @@
                 <a:ea typeface="メイリオ"/>
                 <a:cs typeface="メイリオ"/>
               </a:rPr>
-              <a:t>仮に月30万円 → クリック3,000（CPC 100円）→ 予約30件（予約率1.0%）→ 予約1件あたりの広告費 10,000円</a:t>
+              <a:t>仮に通常20万円 → クリック2,000（CPC 100円）→ 予約20件（予約率1.0%）→ 予約1件あたりの広告費 10,000円</a:t>
+            </a:r>
+          </a:p>
+          <a:p>
+            <a:pPr algn="l">
+              <a:lnSpc>
+                <a:spcPct val="105000"/>
+              </a:lnSpc>
+              <a:spcAft>
+                <a:spcPts val="200"/>
+              </a:spcAft>
+            </a:pPr>
+            <a:r>
+              <a:rPr sz="1100" b="0">
+                <a:solidFill>
+                  <a:srgbClr val="7F7F7F"/>
+                </a:solidFill>
+                <a:latin typeface="メイリオ"/>
+                <a:ea typeface="メイリオ"/>
+                <a:cs typeface="メイリオ"/>
+              </a:rPr>
+              <a:t>仮にCPF10万円 → 友だち500人（1人200円）→ ブロックを除いて約250人が残り、展示会のたびに案内できる</a:t>
             </a:r>
           </a:p>
         </p:txBody>
@@ -5883,7 +6054,7 @@
                 <a:ea typeface="メイリオ"/>
                 <a:cs typeface="メイリオ"/>
               </a:rPr>
-              <a:t>サンクスLINE｜申し込んだ方を来場まで追う</a:t>
+              <a:t>LINEの友だち｜見込みの方と申し込んだ方をLINEで追う</a:t>
             </a:r>
           </a:p>
         </p:txBody>
@@ -5924,7 +6095,7 @@
                 <a:ea typeface="メイリオ"/>
                 <a:cs typeface="メイリオ"/>
               </a:rPr>
-              <a:t>申込完了画面からLINEへ案内し、前日・当日のお知らせで来場につなげる</a:t>
+              <a:t>2つの入口から友だちを増やし、展示会の案内から来場まで追う</a:t>
             </a:r>
             <a:endParaRPr sz="1050" dirty="0">
               <a:solidFill>
@@ -6055,7 +6226,7 @@
                 <a:ea typeface="メイリオ"/>
                 <a:cs typeface="メイリオ"/>
               </a:rPr>
-              <a:t>流れ</a:t>
+              <a:t>入口① CPF｜まだ申し込んでいない方</a:t>
             </a:r>
           </a:p>
         </p:txBody>
@@ -6069,7 +6240,7 @@
         <p:spPr>
           <a:xfrm>
             <a:off x="770400" y="1961999"/>
-            <a:ext cx="1527840" cy="540000"/>
+            <a:ext cx="1963799" cy="540000"/>
           </a:xfrm>
           <a:prstGeom prst="rect">
             <a:avLst/>
@@ -6119,7 +6290,7 @@
                 <a:ea typeface="メイリオ"/>
                 <a:cs typeface="メイリオ"/>
               </a:rPr>
-              <a:t>申込フォーム</a:t>
+              <a:t>LINE広告（CPF）</a:t>
             </a:r>
           </a:p>
         </p:txBody>
@@ -6132,7 +6303,7 @@
         </p:nvCxnSpPr>
         <p:spPr>
           <a:xfrm>
-            <a:off x="2334240" y="2231999"/>
+            <a:off x="2770199" y="2231999"/>
             <a:ext cx="144000" cy="0"/>
           </a:xfrm>
           <a:prstGeom prst="line">
@@ -6168,8 +6339,8 @@
         </p:nvSpPr>
         <p:spPr>
           <a:xfrm>
-            <a:off x="2514240" y="1961999"/>
-            <a:ext cx="1527840" cy="540000"/>
+            <a:off x="2950199" y="1961999"/>
+            <a:ext cx="1963799" cy="540000"/>
           </a:xfrm>
           <a:prstGeom prst="rect">
             <a:avLst/>
@@ -6219,88 +6390,9 @@
                 <a:ea typeface="メイリオ"/>
                 <a:cs typeface="メイリオ"/>
               </a:rPr>
-              <a:t>申込完了画面</a:t>
-            </a:r>
-          </a:p>
-        </p:txBody>
-      </p:sp>
-      <p:cxnSp>
-        <p:nvCxnSpPr>
-          <p:cNvPr id="11" name="Connector 10"/>
-          <p:cNvCxnSpPr/>
-          <p:nvPr/>
-        </p:nvCxnSpPr>
-        <p:spPr>
-          <a:xfrm>
-            <a:off x="4078080" y="2231999"/>
-            <a:ext cx="144000" cy="0"/>
-          </a:xfrm>
-          <a:prstGeom prst="line">
-            <a:avLst/>
-          </a:prstGeom>
-          <a:ln w="19050">
-            <a:solidFill>
-              <a:srgbClr val="1F285A"/>
-            </a:solidFill>
-            <a:tailEnd type="triangle" w="med" len="med"/>
-          </a:ln>
-        </p:spPr>
-        <p:style>
-          <a:lnRef idx="2">
-            <a:schemeClr val="accent1"/>
-          </a:lnRef>
-          <a:fillRef idx="0">
-            <a:schemeClr val="accent1"/>
-          </a:fillRef>
-          <a:effectRef idx="0">
-            <a:schemeClr val="accent1"/>
-          </a:effectRef>
-          <a:fontRef idx="minor">
-            <a:schemeClr val="tx1"/>
-          </a:fontRef>
-        </p:style>
-      </p:cxnSp>
-      <p:sp>
-        <p:nvSpPr>
-          <p:cNvPr id="12" name="Rectangle 11"/>
-          <p:cNvSpPr/>
-          <p:nvPr/>
-        </p:nvSpPr>
-        <p:spPr>
-          <a:xfrm>
-            <a:off x="4258080" y="1961999"/>
-            <a:ext cx="1527840" cy="540000"/>
-          </a:xfrm>
-          <a:prstGeom prst="rect">
-            <a:avLst/>
-          </a:prstGeom>
-          <a:solidFill>
-            <a:srgbClr val="FFFFFF"/>
-          </a:solidFill>
-          <a:ln w="12700">
-            <a:solidFill>
-              <a:srgbClr val="1F285A"/>
-            </a:solidFill>
-          </a:ln>
-          <a:effectLst/>
-        </p:spPr>
-        <p:style>
-          <a:lnRef idx="1">
-            <a:schemeClr val="accent1"/>
-          </a:lnRef>
-          <a:fillRef idx="3">
-            <a:schemeClr val="accent1"/>
-          </a:fillRef>
-          <a:effectRef idx="0">
-            <a:schemeClr val="accent1"/>
-          </a:effectRef>
-          <a:fontRef idx="minor">
-            <a:schemeClr val="lt1"/>
-          </a:fontRef>
-        </p:style>
-        <p:txBody>
-          <a:bodyPr rtlCol="0" anchor="ctr" wrap="square" lIns="36000" tIns="18000" rIns="36000" bIns="18000"/>
-          <a:lstStyle/>
+              <a:t>LINE</a:t>
+            </a:r>
+          </a:p>
           <a:p>
             <a:pPr algn="ctr">
               <a:lnSpc>
@@ -6319,9 +6411,88 @@
                 <a:ea typeface="メイリオ"/>
                 <a:cs typeface="メイリオ"/>
               </a:rPr>
-              <a:t>LINE</a:t>
-            </a:r>
-          </a:p>
+              <a:t>友だち追加</a:t>
+            </a:r>
+          </a:p>
+        </p:txBody>
+      </p:sp>
+      <p:cxnSp>
+        <p:nvCxnSpPr>
+          <p:cNvPr id="11" name="Connector 10"/>
+          <p:cNvCxnSpPr/>
+          <p:nvPr/>
+        </p:nvCxnSpPr>
+        <p:spPr>
+          <a:xfrm>
+            <a:off x="4949999" y="2231999"/>
+            <a:ext cx="144000" cy="0"/>
+          </a:xfrm>
+          <a:prstGeom prst="line">
+            <a:avLst/>
+          </a:prstGeom>
+          <a:ln w="19050">
+            <a:solidFill>
+              <a:srgbClr val="1F285A"/>
+            </a:solidFill>
+            <a:tailEnd type="triangle" w="med" len="med"/>
+          </a:ln>
+        </p:spPr>
+        <p:style>
+          <a:lnRef idx="2">
+            <a:schemeClr val="accent1"/>
+          </a:lnRef>
+          <a:fillRef idx="0">
+            <a:schemeClr val="accent1"/>
+          </a:fillRef>
+          <a:effectRef idx="0">
+            <a:schemeClr val="accent1"/>
+          </a:effectRef>
+          <a:fontRef idx="minor">
+            <a:schemeClr val="tx1"/>
+          </a:fontRef>
+        </p:style>
+      </p:cxnSp>
+      <p:sp>
+        <p:nvSpPr>
+          <p:cNvPr id="12" name="Rectangle 11"/>
+          <p:cNvSpPr/>
+          <p:nvPr/>
+        </p:nvSpPr>
+        <p:spPr>
+          <a:xfrm>
+            <a:off x="5129999" y="1961999"/>
+            <a:ext cx="1963799" cy="540000"/>
+          </a:xfrm>
+          <a:prstGeom prst="rect">
+            <a:avLst/>
+          </a:prstGeom>
+          <a:solidFill>
+            <a:srgbClr val="FFFFFF"/>
+          </a:solidFill>
+          <a:ln w="12700">
+            <a:solidFill>
+              <a:srgbClr val="1F285A"/>
+            </a:solidFill>
+          </a:ln>
+          <a:effectLst/>
+        </p:spPr>
+        <p:style>
+          <a:lnRef idx="1">
+            <a:schemeClr val="accent1"/>
+          </a:lnRef>
+          <a:fillRef idx="3">
+            <a:schemeClr val="accent1"/>
+          </a:fillRef>
+          <a:effectRef idx="0">
+            <a:schemeClr val="accent1"/>
+          </a:effectRef>
+          <a:fontRef idx="minor">
+            <a:schemeClr val="lt1"/>
+          </a:fontRef>
+        </p:style>
+        <p:txBody>
+          <a:bodyPr rtlCol="0" anchor="ctr" wrap="square" lIns="36000" tIns="18000" rIns="36000" bIns="18000"/>
+          <a:lstStyle/>
           <a:p>
             <a:pPr algn="ctr">
               <a:lnSpc>
@@ -6340,88 +6511,9 @@
                 <a:ea typeface="メイリオ"/>
                 <a:cs typeface="メイリオ"/>
               </a:rPr>
-              <a:t>友だち追加</a:t>
-            </a:r>
-          </a:p>
-        </p:txBody>
-      </p:sp>
-      <p:cxnSp>
-        <p:nvCxnSpPr>
-          <p:cNvPr id="13" name="Connector 12"/>
-          <p:cNvCxnSpPr/>
-          <p:nvPr/>
-        </p:nvCxnSpPr>
-        <p:spPr>
-          <a:xfrm>
-            <a:off x="5821920" y="2231999"/>
-            <a:ext cx="144000" cy="0"/>
-          </a:xfrm>
-          <a:prstGeom prst="line">
-            <a:avLst/>
-          </a:prstGeom>
-          <a:ln w="19050">
-            <a:solidFill>
-              <a:srgbClr val="1F285A"/>
-            </a:solidFill>
-            <a:tailEnd type="triangle" w="med" len="med"/>
-          </a:ln>
-        </p:spPr>
-        <p:style>
-          <a:lnRef idx="2">
-            <a:schemeClr val="accent1"/>
-          </a:lnRef>
-          <a:fillRef idx="0">
-            <a:schemeClr val="accent1"/>
-          </a:fillRef>
-          <a:effectRef idx="0">
-            <a:schemeClr val="accent1"/>
-          </a:effectRef>
-          <a:fontRef idx="minor">
-            <a:schemeClr val="tx1"/>
-          </a:fontRef>
-        </p:style>
-      </p:cxnSp>
-      <p:sp>
-        <p:nvSpPr>
-          <p:cNvPr id="14" name="Rectangle 13"/>
-          <p:cNvSpPr/>
-          <p:nvPr/>
-        </p:nvSpPr>
-        <p:spPr>
-          <a:xfrm>
-            <a:off x="6001919" y="1961999"/>
-            <a:ext cx="1527840" cy="540000"/>
-          </a:xfrm>
-          <a:prstGeom prst="rect">
-            <a:avLst/>
-          </a:prstGeom>
-          <a:solidFill>
-            <a:srgbClr val="FFFFFF"/>
-          </a:solidFill>
-          <a:ln w="12700">
-            <a:solidFill>
-              <a:srgbClr val="1F285A"/>
-            </a:solidFill>
-          </a:ln>
-          <a:effectLst/>
-        </p:spPr>
-        <p:style>
-          <a:lnRef idx="1">
-            <a:schemeClr val="accent1"/>
-          </a:lnRef>
-          <a:fillRef idx="3">
-            <a:schemeClr val="accent1"/>
-          </a:fillRef>
-          <a:effectRef idx="0">
-            <a:schemeClr val="accent1"/>
-          </a:effectRef>
-          <a:fontRef idx="minor">
-            <a:schemeClr val="lt1"/>
-          </a:fontRef>
-        </p:style>
-        <p:txBody>
-          <a:bodyPr rtlCol="0" anchor="ctr" wrap="square" lIns="36000" tIns="18000" rIns="36000" bIns="18000"/>
-          <a:lstStyle/>
+              <a:t>展示会ごとに</a:t>
+            </a:r>
+          </a:p>
           <a:p>
             <a:pPr algn="ctr">
               <a:lnSpc>
@@ -6440,9 +6532,88 @@
                 <a:ea typeface="メイリオ"/>
                 <a:cs typeface="メイリオ"/>
               </a:rPr>
-              <a:t>前日・当日の</a:t>
-            </a:r>
-          </a:p>
+              <a:t>エリア別の開催案内</a:t>
+            </a:r>
+          </a:p>
+        </p:txBody>
+      </p:sp>
+      <p:cxnSp>
+        <p:nvCxnSpPr>
+          <p:cNvPr id="13" name="Connector 12"/>
+          <p:cNvCxnSpPr/>
+          <p:nvPr/>
+        </p:nvCxnSpPr>
+        <p:spPr>
+          <a:xfrm>
+            <a:off x="7129800" y="2231999"/>
+            <a:ext cx="143999" cy="0"/>
+          </a:xfrm>
+          <a:prstGeom prst="line">
+            <a:avLst/>
+          </a:prstGeom>
+          <a:ln w="19050">
+            <a:solidFill>
+              <a:srgbClr val="1F285A"/>
+            </a:solidFill>
+            <a:tailEnd type="triangle" w="med" len="med"/>
+          </a:ln>
+        </p:spPr>
+        <p:style>
+          <a:lnRef idx="2">
+            <a:schemeClr val="accent1"/>
+          </a:lnRef>
+          <a:fillRef idx="0">
+            <a:schemeClr val="accent1"/>
+          </a:fillRef>
+          <a:effectRef idx="0">
+            <a:schemeClr val="accent1"/>
+          </a:effectRef>
+          <a:fontRef idx="minor">
+            <a:schemeClr val="tx1"/>
+          </a:fontRef>
+        </p:style>
+      </p:cxnSp>
+      <p:sp>
+        <p:nvSpPr>
+          <p:cNvPr id="14" name="Rectangle 13"/>
+          <p:cNvSpPr/>
+          <p:nvPr/>
+        </p:nvSpPr>
+        <p:spPr>
+          <a:xfrm>
+            <a:off x="7309799" y="1961999"/>
+            <a:ext cx="1963799" cy="540000"/>
+          </a:xfrm>
+          <a:prstGeom prst="rect">
+            <a:avLst/>
+          </a:prstGeom>
+          <a:solidFill>
+            <a:srgbClr val="1F285A"/>
+          </a:solidFill>
+          <a:ln w="12700">
+            <a:solidFill>
+              <a:srgbClr val="1F285A"/>
+            </a:solidFill>
+          </a:ln>
+          <a:effectLst/>
+        </p:spPr>
+        <p:style>
+          <a:lnRef idx="1">
+            <a:schemeClr val="accent1"/>
+          </a:lnRef>
+          <a:fillRef idx="3">
+            <a:schemeClr val="accent1"/>
+          </a:fillRef>
+          <a:effectRef idx="0">
+            <a:schemeClr val="accent1"/>
+          </a:effectRef>
+          <a:fontRef idx="minor">
+            <a:schemeClr val="lt1"/>
+          </a:fontRef>
+        </p:style>
+        <p:txBody>
+          <a:bodyPr rtlCol="0" anchor="ctr" wrap="square" lIns="36000" tIns="18000" rIns="36000" bIns="18000"/>
+          <a:lstStyle/>
           <a:p>
             <a:pPr algn="ctr">
               <a:lnSpc>
@@ -6453,71 +6624,123 @@
               </a:spcAft>
             </a:pPr>
             <a:r>
-              <a:rPr sz="1150" b="0">
-                <a:solidFill>
-                  <a:srgbClr val="333333"/>
-                </a:solidFill>
-                <a:latin typeface="メイリオ"/>
-                <a:ea typeface="メイリオ"/>
-                <a:cs typeface="メイリオ"/>
-              </a:rPr>
-              <a:t>お知らせ</a:t>
-            </a:r>
-          </a:p>
-        </p:txBody>
-      </p:sp>
-      <p:cxnSp>
-        <p:nvCxnSpPr>
-          <p:cNvPr id="15" name="Connector 14"/>
-          <p:cNvCxnSpPr/>
-          <p:nvPr/>
-        </p:nvCxnSpPr>
-        <p:spPr>
-          <a:xfrm>
-            <a:off x="7565759" y="2231999"/>
-            <a:ext cx="144000" cy="0"/>
-          </a:xfrm>
-          <a:prstGeom prst="line">
-            <a:avLst/>
-          </a:prstGeom>
-          <a:ln w="19050">
-            <a:solidFill>
-              <a:srgbClr val="1F285A"/>
-            </a:solidFill>
-            <a:tailEnd type="triangle" w="med" len="med"/>
+              <a:rPr sz="1150" b="1">
+                <a:solidFill>
+                  <a:srgbClr val="FFFFFF"/>
+                </a:solidFill>
+                <a:latin typeface="メイリオ"/>
+                <a:ea typeface="メイリオ"/>
+                <a:cs typeface="メイリオ"/>
+              </a:rPr>
+              <a:t>予約</a:t>
+            </a:r>
+          </a:p>
+        </p:txBody>
+      </p:sp>
+      <p:sp>
+        <p:nvSpPr>
+          <p:cNvPr id="15" name="Rectangle 14"/>
+          <p:cNvSpPr/>
+          <p:nvPr/>
+        </p:nvSpPr>
+        <p:spPr>
+          <a:xfrm>
+            <a:off x="644400" y="2732399"/>
+            <a:ext cx="54000" cy="180000"/>
+          </a:xfrm>
+          <a:prstGeom prst="rect">
+            <a:avLst/>
+          </a:prstGeom>
+          <a:solidFill>
+            <a:srgbClr val="1F285A"/>
+          </a:solidFill>
+          <a:ln>
+            <a:noFill/>
           </a:ln>
+          <a:effectLst/>
         </p:spPr>
         <p:style>
-          <a:lnRef idx="2">
+          <a:lnRef idx="1">
             <a:schemeClr val="accent1"/>
           </a:lnRef>
-          <a:fillRef idx="0">
+          <a:fillRef idx="3">
             <a:schemeClr val="accent1"/>
           </a:fillRef>
           <a:effectRef idx="0">
             <a:schemeClr val="accent1"/>
           </a:effectRef>
           <a:fontRef idx="minor">
-            <a:schemeClr val="tx1"/>
+            <a:schemeClr val="lt1"/>
           </a:fontRef>
         </p:style>
-      </p:cxnSp>
-      <p:sp>
-        <p:nvSpPr>
-          <p:cNvPr id="16" name="Rectangle 15"/>
+        <p:txBody>
+          <a:bodyPr rtlCol="0" anchor="ctr" wrap="square" lIns="72000" tIns="18000" rIns="72000" bIns="18000"/>
+          <a:lstStyle/>
+          <a:p>
+            <a:pPr algn="ctr"/>
+          </a:p>
+        </p:txBody>
+      </p:sp>
+      <p:sp>
+        <p:nvSpPr>
+          <p:cNvPr id="16" name="TextBox 15"/>
+          <p:cNvSpPr txBox="1"/>
+          <p:nvPr/>
+        </p:nvSpPr>
+        <p:spPr>
+          <a:xfrm>
+            <a:off x="770400" y="2681999"/>
+            <a:ext cx="8503200" cy="288000"/>
+          </a:xfrm>
+          <a:prstGeom prst="rect">
+            <a:avLst/>
+          </a:prstGeom>
+          <a:noFill/>
+        </p:spPr>
+        <p:txBody>
+          <a:bodyPr wrap="square" anchor="t" lIns="36000" rIns="36000" tIns="10800" bIns="10800">
+            <a:spAutoFit/>
+          </a:bodyPr>
+          <a:lstStyle/>
+          <a:p>
+            <a:pPr algn="l">
+              <a:lnSpc>
+                <a:spcPct val="105000"/>
+              </a:lnSpc>
+              <a:spcAft>
+                <a:spcPts val="200"/>
+              </a:spcAft>
+            </a:pPr>
+            <a:r>
+              <a:rPr sz="1350" b="1">
+                <a:solidFill>
+                  <a:srgbClr val="1F285A"/>
+                </a:solidFill>
+                <a:latin typeface="メイリオ"/>
+                <a:ea typeface="メイリオ"/>
+                <a:cs typeface="メイリオ"/>
+              </a:rPr>
+              <a:t>入口② サンクスLINE｜申し込んだ方</a:t>
+            </a:r>
+          </a:p>
+        </p:txBody>
+      </p:sp>
+      <p:sp>
+        <p:nvSpPr>
+          <p:cNvPr id="17" name="Rectangle 16"/>
           <p:cNvSpPr/>
           <p:nvPr/>
         </p:nvSpPr>
         <p:spPr>
           <a:xfrm>
-            <a:off x="7745759" y="1961999"/>
-            <a:ext cx="1527840" cy="540000"/>
-          </a:xfrm>
-          <a:prstGeom prst="rect">
-            <a:avLst/>
-          </a:prstGeom>
-          <a:solidFill>
-            <a:srgbClr val="1F285A"/>
+            <a:off x="770400" y="3023999"/>
+            <a:ext cx="1963799" cy="540000"/>
+          </a:xfrm>
+          <a:prstGeom prst="rect">
+            <a:avLst/>
+          </a:prstGeom>
+          <a:solidFill>
+            <a:srgbClr val="FFFFFF"/>
           </a:solidFill>
           <a:ln w="12700">
             <a:solidFill>
@@ -6553,38 +6776,76 @@
               </a:spcAft>
             </a:pPr>
             <a:r>
-              <a:rPr sz="1150" b="1">
-                <a:solidFill>
-                  <a:srgbClr val="FFFFFF"/>
-                </a:solidFill>
-                <a:latin typeface="メイリオ"/>
-                <a:ea typeface="メイリオ"/>
-                <a:cs typeface="メイリオ"/>
-              </a:rPr>
-              <a:t>来場</a:t>
-            </a:r>
-          </a:p>
-        </p:txBody>
-      </p:sp>
-      <p:sp>
-        <p:nvSpPr>
-          <p:cNvPr id="17" name="Rectangle 16"/>
+              <a:rPr sz="1150" b="0">
+                <a:solidFill>
+                  <a:srgbClr val="333333"/>
+                </a:solidFill>
+                <a:latin typeface="メイリオ"/>
+                <a:ea typeface="メイリオ"/>
+                <a:cs typeface="メイリオ"/>
+              </a:rPr>
+              <a:t>申込完了画面</a:t>
+            </a:r>
+          </a:p>
+        </p:txBody>
+      </p:sp>
+      <p:cxnSp>
+        <p:nvCxnSpPr>
+          <p:cNvPr id="18" name="Connector 17"/>
+          <p:cNvCxnSpPr/>
+          <p:nvPr/>
+        </p:nvCxnSpPr>
+        <p:spPr>
+          <a:xfrm>
+            <a:off x="2770199" y="3293999"/>
+            <a:ext cx="144000" cy="0"/>
+          </a:xfrm>
+          <a:prstGeom prst="line">
+            <a:avLst/>
+          </a:prstGeom>
+          <a:ln w="19050">
+            <a:solidFill>
+              <a:srgbClr val="1F285A"/>
+            </a:solidFill>
+            <a:tailEnd type="triangle" w="med" len="med"/>
+          </a:ln>
+        </p:spPr>
+        <p:style>
+          <a:lnRef idx="2">
+            <a:schemeClr val="accent1"/>
+          </a:lnRef>
+          <a:fillRef idx="0">
+            <a:schemeClr val="accent1"/>
+          </a:fillRef>
+          <a:effectRef idx="0">
+            <a:schemeClr val="accent1"/>
+          </a:effectRef>
+          <a:fontRef idx="minor">
+            <a:schemeClr val="tx1"/>
+          </a:fontRef>
+        </p:style>
+      </p:cxnSp>
+      <p:sp>
+        <p:nvSpPr>
+          <p:cNvPr id="19" name="Rectangle 18"/>
           <p:cNvSpPr/>
           <p:nvPr/>
         </p:nvSpPr>
         <p:spPr>
           <a:xfrm>
-            <a:off x="644400" y="2768399"/>
-            <a:ext cx="54000" cy="180000"/>
-          </a:xfrm>
-          <a:prstGeom prst="rect">
-            <a:avLst/>
-          </a:prstGeom>
-          <a:solidFill>
-            <a:srgbClr val="1F285A"/>
-          </a:solidFill>
-          <a:ln>
-            <a:noFill/>
+            <a:off x="2950199" y="3023999"/>
+            <a:ext cx="1963799" cy="540000"/>
+          </a:xfrm>
+          <a:prstGeom prst="rect">
+            <a:avLst/>
+          </a:prstGeom>
+          <a:solidFill>
+            <a:srgbClr val="FFFFFF"/>
+          </a:solidFill>
+          <a:ln w="12700">
+            <a:solidFill>
+              <a:srgbClr val="1F285A"/>
+            </a:solidFill>
           </a:ln>
           <a:effectLst/>
         </p:spPr>
@@ -6603,6 +6864,310 @@
           </a:fontRef>
         </p:style>
         <p:txBody>
+          <a:bodyPr rtlCol="0" anchor="ctr" wrap="square" lIns="36000" tIns="18000" rIns="36000" bIns="18000"/>
+          <a:lstStyle/>
+          <a:p>
+            <a:pPr algn="ctr">
+              <a:lnSpc>
+                <a:spcPct val="110000"/>
+              </a:lnSpc>
+              <a:spcAft>
+                <a:spcPts val="0"/>
+              </a:spcAft>
+            </a:pPr>
+            <a:r>
+              <a:rPr sz="1150" b="0">
+                <a:solidFill>
+                  <a:srgbClr val="333333"/>
+                </a:solidFill>
+                <a:latin typeface="メイリオ"/>
+                <a:ea typeface="メイリオ"/>
+                <a:cs typeface="メイリオ"/>
+              </a:rPr>
+              <a:t>LINE</a:t>
+            </a:r>
+          </a:p>
+          <a:p>
+            <a:pPr algn="ctr">
+              <a:lnSpc>
+                <a:spcPct val="110000"/>
+              </a:lnSpc>
+              <a:spcAft>
+                <a:spcPts val="0"/>
+              </a:spcAft>
+            </a:pPr>
+            <a:r>
+              <a:rPr sz="1150" b="0">
+                <a:solidFill>
+                  <a:srgbClr val="333333"/>
+                </a:solidFill>
+                <a:latin typeface="メイリオ"/>
+                <a:ea typeface="メイリオ"/>
+                <a:cs typeface="メイリオ"/>
+              </a:rPr>
+              <a:t>友だち追加</a:t>
+            </a:r>
+          </a:p>
+        </p:txBody>
+      </p:sp>
+      <p:cxnSp>
+        <p:nvCxnSpPr>
+          <p:cNvPr id="20" name="Connector 19"/>
+          <p:cNvCxnSpPr/>
+          <p:nvPr/>
+        </p:nvCxnSpPr>
+        <p:spPr>
+          <a:xfrm>
+            <a:off x="4949999" y="3293999"/>
+            <a:ext cx="144000" cy="0"/>
+          </a:xfrm>
+          <a:prstGeom prst="line">
+            <a:avLst/>
+          </a:prstGeom>
+          <a:ln w="19050">
+            <a:solidFill>
+              <a:srgbClr val="1F285A"/>
+            </a:solidFill>
+            <a:tailEnd type="triangle" w="med" len="med"/>
+          </a:ln>
+        </p:spPr>
+        <p:style>
+          <a:lnRef idx="2">
+            <a:schemeClr val="accent1"/>
+          </a:lnRef>
+          <a:fillRef idx="0">
+            <a:schemeClr val="accent1"/>
+          </a:fillRef>
+          <a:effectRef idx="0">
+            <a:schemeClr val="accent1"/>
+          </a:effectRef>
+          <a:fontRef idx="minor">
+            <a:schemeClr val="tx1"/>
+          </a:fontRef>
+        </p:style>
+      </p:cxnSp>
+      <p:sp>
+        <p:nvSpPr>
+          <p:cNvPr id="21" name="Rectangle 20"/>
+          <p:cNvSpPr/>
+          <p:nvPr/>
+        </p:nvSpPr>
+        <p:spPr>
+          <a:xfrm>
+            <a:off x="5129999" y="3023999"/>
+            <a:ext cx="1963799" cy="540000"/>
+          </a:xfrm>
+          <a:prstGeom prst="rect">
+            <a:avLst/>
+          </a:prstGeom>
+          <a:solidFill>
+            <a:srgbClr val="FFFFFF"/>
+          </a:solidFill>
+          <a:ln w="12700">
+            <a:solidFill>
+              <a:srgbClr val="1F285A"/>
+            </a:solidFill>
+          </a:ln>
+          <a:effectLst/>
+        </p:spPr>
+        <p:style>
+          <a:lnRef idx="1">
+            <a:schemeClr val="accent1"/>
+          </a:lnRef>
+          <a:fillRef idx="3">
+            <a:schemeClr val="accent1"/>
+          </a:fillRef>
+          <a:effectRef idx="0">
+            <a:schemeClr val="accent1"/>
+          </a:effectRef>
+          <a:fontRef idx="minor">
+            <a:schemeClr val="lt1"/>
+          </a:fontRef>
+        </p:style>
+        <p:txBody>
+          <a:bodyPr rtlCol="0" anchor="ctr" wrap="square" lIns="36000" tIns="18000" rIns="36000" bIns="18000"/>
+          <a:lstStyle/>
+          <a:p>
+            <a:pPr algn="ctr">
+              <a:lnSpc>
+                <a:spcPct val="110000"/>
+              </a:lnSpc>
+              <a:spcAft>
+                <a:spcPts val="0"/>
+              </a:spcAft>
+            </a:pPr>
+            <a:r>
+              <a:rPr sz="1150" b="0">
+                <a:solidFill>
+                  <a:srgbClr val="333333"/>
+                </a:solidFill>
+                <a:latin typeface="メイリオ"/>
+                <a:ea typeface="メイリオ"/>
+                <a:cs typeface="メイリオ"/>
+              </a:rPr>
+              <a:t>前日・当日の</a:t>
+            </a:r>
+          </a:p>
+          <a:p>
+            <a:pPr algn="ctr">
+              <a:lnSpc>
+                <a:spcPct val="110000"/>
+              </a:lnSpc>
+              <a:spcAft>
+                <a:spcPts val="0"/>
+              </a:spcAft>
+            </a:pPr>
+            <a:r>
+              <a:rPr sz="1150" b="0">
+                <a:solidFill>
+                  <a:srgbClr val="333333"/>
+                </a:solidFill>
+                <a:latin typeface="メイリオ"/>
+                <a:ea typeface="メイリオ"/>
+                <a:cs typeface="メイリオ"/>
+              </a:rPr>
+              <a:t>お知らせ</a:t>
+            </a:r>
+          </a:p>
+        </p:txBody>
+      </p:sp>
+      <p:cxnSp>
+        <p:nvCxnSpPr>
+          <p:cNvPr id="22" name="Connector 21"/>
+          <p:cNvCxnSpPr/>
+          <p:nvPr/>
+        </p:nvCxnSpPr>
+        <p:spPr>
+          <a:xfrm>
+            <a:off x="7129800" y="3293999"/>
+            <a:ext cx="143999" cy="0"/>
+          </a:xfrm>
+          <a:prstGeom prst="line">
+            <a:avLst/>
+          </a:prstGeom>
+          <a:ln w="19050">
+            <a:solidFill>
+              <a:srgbClr val="1F285A"/>
+            </a:solidFill>
+            <a:tailEnd type="triangle" w="med" len="med"/>
+          </a:ln>
+        </p:spPr>
+        <p:style>
+          <a:lnRef idx="2">
+            <a:schemeClr val="accent1"/>
+          </a:lnRef>
+          <a:fillRef idx="0">
+            <a:schemeClr val="accent1"/>
+          </a:fillRef>
+          <a:effectRef idx="0">
+            <a:schemeClr val="accent1"/>
+          </a:effectRef>
+          <a:fontRef idx="minor">
+            <a:schemeClr val="tx1"/>
+          </a:fontRef>
+        </p:style>
+      </p:cxnSp>
+      <p:sp>
+        <p:nvSpPr>
+          <p:cNvPr id="23" name="Rectangle 22"/>
+          <p:cNvSpPr/>
+          <p:nvPr/>
+        </p:nvSpPr>
+        <p:spPr>
+          <a:xfrm>
+            <a:off x="7309799" y="3023999"/>
+            <a:ext cx="1963799" cy="540000"/>
+          </a:xfrm>
+          <a:prstGeom prst="rect">
+            <a:avLst/>
+          </a:prstGeom>
+          <a:solidFill>
+            <a:srgbClr val="1F285A"/>
+          </a:solidFill>
+          <a:ln w="12700">
+            <a:solidFill>
+              <a:srgbClr val="1F285A"/>
+            </a:solidFill>
+          </a:ln>
+          <a:effectLst/>
+        </p:spPr>
+        <p:style>
+          <a:lnRef idx="1">
+            <a:schemeClr val="accent1"/>
+          </a:lnRef>
+          <a:fillRef idx="3">
+            <a:schemeClr val="accent1"/>
+          </a:fillRef>
+          <a:effectRef idx="0">
+            <a:schemeClr val="accent1"/>
+          </a:effectRef>
+          <a:fontRef idx="minor">
+            <a:schemeClr val="lt1"/>
+          </a:fontRef>
+        </p:style>
+        <p:txBody>
+          <a:bodyPr rtlCol="0" anchor="ctr" wrap="square" lIns="36000" tIns="18000" rIns="36000" bIns="18000"/>
+          <a:lstStyle/>
+          <a:p>
+            <a:pPr algn="ctr">
+              <a:lnSpc>
+                <a:spcPct val="110000"/>
+              </a:lnSpc>
+              <a:spcAft>
+                <a:spcPts val="0"/>
+              </a:spcAft>
+            </a:pPr>
+            <a:r>
+              <a:rPr sz="1150" b="1">
+                <a:solidFill>
+                  <a:srgbClr val="FFFFFF"/>
+                </a:solidFill>
+                <a:latin typeface="メイリオ"/>
+                <a:ea typeface="メイリオ"/>
+                <a:cs typeface="メイリオ"/>
+              </a:rPr>
+              <a:t>来場</a:t>
+            </a:r>
+          </a:p>
+        </p:txBody>
+      </p:sp>
+      <p:sp>
+        <p:nvSpPr>
+          <p:cNvPr id="24" name="Rectangle 23"/>
+          <p:cNvSpPr/>
+          <p:nvPr/>
+        </p:nvSpPr>
+        <p:spPr>
+          <a:xfrm>
+            <a:off x="644400" y="3794399"/>
+            <a:ext cx="54000" cy="180000"/>
+          </a:xfrm>
+          <a:prstGeom prst="rect">
+            <a:avLst/>
+          </a:prstGeom>
+          <a:solidFill>
+            <a:srgbClr val="1F285A"/>
+          </a:solidFill>
+          <a:ln>
+            <a:noFill/>
+          </a:ln>
+          <a:effectLst/>
+        </p:spPr>
+        <p:style>
+          <a:lnRef idx="1">
+            <a:schemeClr val="accent1"/>
+          </a:lnRef>
+          <a:fillRef idx="3">
+            <a:schemeClr val="accent1"/>
+          </a:fillRef>
+          <a:effectRef idx="0">
+            <a:schemeClr val="accent1"/>
+          </a:effectRef>
+          <a:fontRef idx="minor">
+            <a:schemeClr val="lt1"/>
+          </a:fontRef>
+        </p:style>
+        <p:txBody>
           <a:bodyPr rtlCol="0" anchor="ctr" wrap="square" lIns="72000" tIns="18000" rIns="72000" bIns="18000"/>
           <a:lstStyle/>
           <a:p>
@@ -6612,13 +7177,13 @@
       </p:sp>
       <p:sp>
         <p:nvSpPr>
-          <p:cNvPr id="18" name="TextBox 17"/>
+          <p:cNvPr id="25" name="TextBox 24"/>
           <p:cNvSpPr txBox="1"/>
           <p:nvPr/>
         </p:nvSpPr>
         <p:spPr>
           <a:xfrm>
-            <a:off x="770400" y="2717999"/>
+            <a:off x="770400" y="3743999"/>
             <a:ext cx="8503200" cy="288000"/>
           </a:xfrm>
           <a:prstGeom prst="rect">
@@ -6649,20 +7214,20 @@
                 <a:ea typeface="メイリオ"/>
                 <a:cs typeface="メイリオ"/>
               </a:rPr>
-              <a:t>友だちへの配信</a:t>
-            </a:r>
-          </a:p>
-        </p:txBody>
-      </p:sp>
-      <p:sp>
-        <p:nvSpPr>
-          <p:cNvPr id="19" name="TextBox 18"/>
+              <a:t>実績・費用</a:t>
+            </a:r>
+          </a:p>
+        </p:txBody>
+      </p:sp>
+      <p:sp>
+        <p:nvSpPr>
+          <p:cNvPr id="26" name="TextBox 25"/>
           <p:cNvSpPr txBox="1"/>
           <p:nvPr/>
         </p:nvSpPr>
         <p:spPr>
           <a:xfrm>
-            <a:off x="770400" y="3023999"/>
+            <a:off x="770400" y="4049999"/>
             <a:ext cx="1655999" cy="259200"/>
           </a:xfrm>
           <a:prstGeom prst="rect">
@@ -6693,20 +7258,20 @@
                 <a:ea typeface="メイリオ"/>
                 <a:cs typeface="メイリオ"/>
               </a:rPr>
-              <a:t>タイミング</a:t>
-            </a:r>
-          </a:p>
-        </p:txBody>
-      </p:sp>
-      <p:sp>
-        <p:nvSpPr>
-          <p:cNvPr id="20" name="TextBox 19"/>
+              <a:t>実績</a:t>
+            </a:r>
+          </a:p>
+        </p:txBody>
+      </p:sp>
+      <p:sp>
+        <p:nvSpPr>
+          <p:cNvPr id="27" name="TextBox 26"/>
           <p:cNvSpPr txBox="1"/>
           <p:nvPr/>
         </p:nvSpPr>
         <p:spPr>
           <a:xfrm>
-            <a:off x="2426400" y="3023999"/>
+            <a:off x="2426400" y="4049999"/>
             <a:ext cx="6847199" cy="259200"/>
           </a:xfrm>
           <a:prstGeom prst="rect">
@@ -6737,20 +7302,20 @@
                 <a:ea typeface="メイリオ"/>
                 <a:cs typeface="メイリオ"/>
               </a:rPr>
-              <a:t>登録直後 → 2週間前 → 3日前 → 当日朝 → 終了後</a:t>
-            </a:r>
-          </a:p>
-        </p:txBody>
-      </p:sp>
-      <p:sp>
-        <p:nvSpPr>
-          <p:cNvPr id="21" name="TextBox 20"/>
+              <a:t>弊社運用の美容クリニックで、予約後の来院率 40〜50%改善</a:t>
+            </a:r>
+          </a:p>
+        </p:txBody>
+      </p:sp>
+      <p:sp>
+        <p:nvSpPr>
+          <p:cNvPr id="28" name="TextBox 27"/>
           <p:cNvSpPr txBox="1"/>
           <p:nvPr/>
         </p:nvSpPr>
         <p:spPr>
           <a:xfrm>
-            <a:off x="770400" y="3283199"/>
+            <a:off x="770400" y="4309200"/>
             <a:ext cx="1655999" cy="259200"/>
           </a:xfrm>
           <a:prstGeom prst="rect">
@@ -6781,20 +7346,20 @@
                 <a:ea typeface="メイリオ"/>
                 <a:cs typeface="メイリオ"/>
               </a:rPr>
-              <a:t>内容</a:t>
-            </a:r>
-          </a:p>
-        </p:txBody>
-      </p:sp>
-      <p:sp>
-        <p:nvSpPr>
-          <p:cNvPr id="22" name="TextBox 21"/>
+              <a:t>費用</a:t>
+            </a:r>
+          </a:p>
+        </p:txBody>
+      </p:sp>
+      <p:sp>
+        <p:nvSpPr>
+          <p:cNvPr id="29" name="TextBox 28"/>
           <p:cNvSpPr txBox="1"/>
           <p:nvPr/>
         </p:nvSpPr>
         <p:spPr>
           <a:xfrm>
-            <a:off x="2426400" y="3283199"/>
+            <a:off x="2426400" y="4309200"/>
             <a:ext cx="6847199" cy="259200"/>
           </a:xfrm>
           <a:prstGeom prst="rect">
@@ -6825,271 +7390,7 @@
                 <a:ea typeface="メイリオ"/>
                 <a:cs typeface="メイリオ"/>
               </a:rPr>
-              <a:t>概要・予約 → 見どころ → リマインド・アクセス → 開催のお知らせ → お礼・次回案内</a:t>
-            </a:r>
-          </a:p>
-        </p:txBody>
-      </p:sp>
-      <p:sp>
-        <p:nvSpPr>
-          <p:cNvPr id="23" name="Rectangle 22"/>
-          <p:cNvSpPr/>
-          <p:nvPr/>
-        </p:nvSpPr>
-        <p:spPr>
-          <a:xfrm>
-            <a:off x="644400" y="3772799"/>
-            <a:ext cx="54000" cy="180000"/>
-          </a:xfrm>
-          <a:prstGeom prst="rect">
-            <a:avLst/>
-          </a:prstGeom>
-          <a:solidFill>
-            <a:srgbClr val="1F285A"/>
-          </a:solidFill>
-          <a:ln>
-            <a:noFill/>
-          </a:ln>
-          <a:effectLst/>
-        </p:spPr>
-        <p:style>
-          <a:lnRef idx="1">
-            <a:schemeClr val="accent1"/>
-          </a:lnRef>
-          <a:fillRef idx="3">
-            <a:schemeClr val="accent1"/>
-          </a:fillRef>
-          <a:effectRef idx="0">
-            <a:schemeClr val="accent1"/>
-          </a:effectRef>
-          <a:fontRef idx="minor">
-            <a:schemeClr val="lt1"/>
-          </a:fontRef>
-        </p:style>
-        <p:txBody>
-          <a:bodyPr rtlCol="0" anchor="ctr" wrap="square" lIns="72000" tIns="18000" rIns="72000" bIns="18000"/>
-          <a:lstStyle/>
-          <a:p>
-            <a:pPr algn="ctr"/>
-          </a:p>
-        </p:txBody>
-      </p:sp>
-      <p:sp>
-        <p:nvSpPr>
-          <p:cNvPr id="24" name="TextBox 23"/>
-          <p:cNvSpPr txBox="1"/>
-          <p:nvPr/>
-        </p:nvSpPr>
-        <p:spPr>
-          <a:xfrm>
-            <a:off x="770400" y="3722399"/>
-            <a:ext cx="8503200" cy="288000"/>
-          </a:xfrm>
-          <a:prstGeom prst="rect">
-            <a:avLst/>
-          </a:prstGeom>
-          <a:noFill/>
-        </p:spPr>
-        <p:txBody>
-          <a:bodyPr wrap="square" anchor="t" lIns="36000" rIns="36000" tIns="10800" bIns="10800">
-            <a:spAutoFit/>
-          </a:bodyPr>
-          <a:lstStyle/>
-          <a:p>
-            <a:pPr algn="l">
-              <a:lnSpc>
-                <a:spcPct val="105000"/>
-              </a:lnSpc>
-              <a:spcAft>
-                <a:spcPts val="200"/>
-              </a:spcAft>
-            </a:pPr>
-            <a:r>
-              <a:rPr sz="1350" b="1">
-                <a:solidFill>
-                  <a:srgbClr val="1F285A"/>
-                </a:solidFill>
-                <a:latin typeface="メイリオ"/>
-                <a:ea typeface="メイリオ"/>
-                <a:cs typeface="メイリオ"/>
-              </a:rPr>
-              <a:t>実績・費用</a:t>
-            </a:r>
-          </a:p>
-        </p:txBody>
-      </p:sp>
-      <p:sp>
-        <p:nvSpPr>
-          <p:cNvPr id="25" name="TextBox 24"/>
-          <p:cNvSpPr txBox="1"/>
-          <p:nvPr/>
-        </p:nvSpPr>
-        <p:spPr>
-          <a:xfrm>
-            <a:off x="770400" y="4028399"/>
-            <a:ext cx="1655999" cy="259200"/>
-          </a:xfrm>
-          <a:prstGeom prst="rect">
-            <a:avLst/>
-          </a:prstGeom>
-          <a:noFill/>
-        </p:spPr>
-        <p:txBody>
-          <a:bodyPr wrap="square" anchor="t" lIns="36000" rIns="36000" tIns="10800" bIns="10800">
-            <a:spAutoFit/>
-          </a:bodyPr>
-          <a:lstStyle/>
-          <a:p>
-            <a:pPr algn="l">
-              <a:lnSpc>
-                <a:spcPct val="105000"/>
-              </a:lnSpc>
-              <a:spcAft>
-                <a:spcPts val="200"/>
-              </a:spcAft>
-            </a:pPr>
-            <a:r>
-              <a:rPr sz="1300" b="1">
-                <a:solidFill>
-                  <a:srgbClr val="333333"/>
-                </a:solidFill>
-                <a:latin typeface="メイリオ"/>
-                <a:ea typeface="メイリオ"/>
-                <a:cs typeface="メイリオ"/>
-              </a:rPr>
-              <a:t>実績</a:t>
-            </a:r>
-          </a:p>
-        </p:txBody>
-      </p:sp>
-      <p:sp>
-        <p:nvSpPr>
-          <p:cNvPr id="26" name="TextBox 25"/>
-          <p:cNvSpPr txBox="1"/>
-          <p:nvPr/>
-        </p:nvSpPr>
-        <p:spPr>
-          <a:xfrm>
-            <a:off x="2426400" y="4028399"/>
-            <a:ext cx="6847199" cy="259200"/>
-          </a:xfrm>
-          <a:prstGeom prst="rect">
-            <a:avLst/>
-          </a:prstGeom>
-          <a:noFill/>
-        </p:spPr>
-        <p:txBody>
-          <a:bodyPr wrap="square" anchor="t" lIns="36000" rIns="36000" tIns="10800" bIns="10800">
-            <a:spAutoFit/>
-          </a:bodyPr>
-          <a:lstStyle/>
-          <a:p>
-            <a:pPr algn="l">
-              <a:lnSpc>
-                <a:spcPct val="105000"/>
-              </a:lnSpc>
-              <a:spcAft>
-                <a:spcPts val="200"/>
-              </a:spcAft>
-            </a:pPr>
-            <a:r>
-              <a:rPr sz="1300" b="0">
-                <a:solidFill>
-                  <a:srgbClr val="333333"/>
-                </a:solidFill>
-                <a:latin typeface="メイリオ"/>
-                <a:ea typeface="メイリオ"/>
-                <a:cs typeface="メイリオ"/>
-              </a:rPr>
-              <a:t>弊社運用の美容クリニックで、予約後の来院率 40〜50%改善</a:t>
-            </a:r>
-          </a:p>
-        </p:txBody>
-      </p:sp>
-      <p:sp>
-        <p:nvSpPr>
-          <p:cNvPr id="27" name="TextBox 26"/>
-          <p:cNvSpPr txBox="1"/>
-          <p:nvPr/>
-        </p:nvSpPr>
-        <p:spPr>
-          <a:xfrm>
-            <a:off x="770400" y="4287599"/>
-            <a:ext cx="1655999" cy="259200"/>
-          </a:xfrm>
-          <a:prstGeom prst="rect">
-            <a:avLst/>
-          </a:prstGeom>
-          <a:noFill/>
-        </p:spPr>
-        <p:txBody>
-          <a:bodyPr wrap="square" anchor="t" lIns="36000" rIns="36000" tIns="10800" bIns="10800">
-            <a:spAutoFit/>
-          </a:bodyPr>
-          <a:lstStyle/>
-          <a:p>
-            <a:pPr algn="l">
-              <a:lnSpc>
-                <a:spcPct val="105000"/>
-              </a:lnSpc>
-              <a:spcAft>
-                <a:spcPts val="200"/>
-              </a:spcAft>
-            </a:pPr>
-            <a:r>
-              <a:rPr sz="1300" b="1">
-                <a:solidFill>
-                  <a:srgbClr val="333333"/>
-                </a:solidFill>
-                <a:latin typeface="メイリオ"/>
-                <a:ea typeface="メイリオ"/>
-                <a:cs typeface="メイリオ"/>
-              </a:rPr>
-              <a:t>費用</a:t>
-            </a:r>
-          </a:p>
-        </p:txBody>
-      </p:sp>
-      <p:sp>
-        <p:nvSpPr>
-          <p:cNvPr id="28" name="TextBox 27"/>
-          <p:cNvSpPr txBox="1"/>
-          <p:nvPr/>
-        </p:nvSpPr>
-        <p:spPr>
-          <a:xfrm>
-            <a:off x="2426400" y="4287599"/>
-            <a:ext cx="6847199" cy="259200"/>
-          </a:xfrm>
-          <a:prstGeom prst="rect">
-            <a:avLst/>
-          </a:prstGeom>
-          <a:noFill/>
-        </p:spPr>
-        <p:txBody>
-          <a:bodyPr wrap="square" anchor="t" lIns="36000" rIns="36000" tIns="10800" bIns="10800">
-            <a:spAutoFit/>
-          </a:bodyPr>
-          <a:lstStyle/>
-          <a:p>
-            <a:pPr algn="l">
-              <a:lnSpc>
-                <a:spcPct val="105000"/>
-              </a:lnSpc>
-              <a:spcAft>
-                <a:spcPts val="200"/>
-              </a:spcAft>
-            </a:pPr>
-            <a:r>
-              <a:rPr sz="1300" b="0">
-                <a:solidFill>
-                  <a:srgbClr val="333333"/>
-                </a:solidFill>
-                <a:latin typeface="メイリオ"/>
-                <a:ea typeface="メイリオ"/>
-                <a:cs typeface="メイリオ"/>
-              </a:rPr>
-              <a:t>初期15万円・月額3万円〜</a:t>
+              <a:t>CPFは2枚目の枠に含む／サンクスLINEは初期15万円・月額3万円〜</a:t>
             </a:r>
           </a:p>
         </p:txBody>

--- a/20261013_展示会LINE運用方針_予算枠のご提案.pptx
+++ b/20261013_展示会LINE運用方針_予算枠のご提案.pptx
@@ -2796,7 +2796,7 @@
         </p:nvSpPr>
         <p:spPr>
           <a:xfrm>
-            <a:off x="644400" y="1670400"/>
+            <a:off x="644400" y="2455200"/>
             <a:ext cx="54000" cy="180000"/>
           </a:xfrm>
           <a:prstGeom prst="rect">
@@ -2840,7 +2840,7 @@
         </p:nvSpPr>
         <p:spPr>
           <a:xfrm>
-            <a:off x="770400" y="1620000"/>
+            <a:off x="770400" y="2404800"/>
             <a:ext cx="8503200" cy="288000"/>
           </a:xfrm>
           <a:prstGeom prst="rect">
@@ -2884,7 +2884,7 @@
         </p:nvSpPr>
         <p:spPr>
           <a:xfrm>
-            <a:off x="770400" y="1925999"/>
+            <a:off x="770400" y="2710799"/>
             <a:ext cx="1655999" cy="259200"/>
           </a:xfrm>
           <a:prstGeom prst="rect">
@@ -2928,7 +2928,7 @@
         </p:nvSpPr>
         <p:spPr>
           <a:xfrm>
-            <a:off x="2426400" y="1925999"/>
+            <a:off x="2426400" y="2710799"/>
             <a:ext cx="6847199" cy="259200"/>
           </a:xfrm>
           <a:prstGeom prst="rect">
@@ -2972,7 +2972,7 @@
         </p:nvSpPr>
         <p:spPr>
           <a:xfrm>
-            <a:off x="770400" y="2185200"/>
+            <a:off x="770400" y="2970000"/>
             <a:ext cx="1655999" cy="259200"/>
           </a:xfrm>
           <a:prstGeom prst="rect">
@@ -3016,7 +3016,7 @@
         </p:nvSpPr>
         <p:spPr>
           <a:xfrm>
-            <a:off x="2426400" y="2185200"/>
+            <a:off x="2426400" y="2970000"/>
             <a:ext cx="6847199" cy="259200"/>
           </a:xfrm>
           <a:prstGeom prst="rect">
@@ -3060,7 +3060,7 @@
         </p:nvSpPr>
         <p:spPr>
           <a:xfrm>
-            <a:off x="644400" y="2674799"/>
+            <a:off x="644400" y="3459599"/>
             <a:ext cx="54000" cy="180000"/>
           </a:xfrm>
           <a:prstGeom prst="rect">
@@ -3104,7 +3104,7 @@
         </p:nvSpPr>
         <p:spPr>
           <a:xfrm>
-            <a:off x="770400" y="2624399"/>
+            <a:off x="770400" y="3409199"/>
             <a:ext cx="8503200" cy="288000"/>
           </a:xfrm>
           <a:prstGeom prst="rect">
@@ -3148,7 +3148,7 @@
         </p:nvSpPr>
         <p:spPr>
           <a:xfrm>
-            <a:off x="770400" y="2966399"/>
+            <a:off x="770400" y="3751199"/>
             <a:ext cx="2654399" cy="486000"/>
           </a:xfrm>
           <a:prstGeom prst="rect">
@@ -3212,7 +3212,7 @@
         </p:nvCxnSpPr>
         <p:spPr>
           <a:xfrm>
-            <a:off x="3460799" y="3209399"/>
+            <a:off x="3460799" y="3994199"/>
             <a:ext cx="198000" cy="0"/>
           </a:xfrm>
           <a:prstGeom prst="line">
@@ -3248,7 +3248,7 @@
         </p:nvSpPr>
         <p:spPr>
           <a:xfrm>
-            <a:off x="3694799" y="2966399"/>
+            <a:off x="3694799" y="3751199"/>
             <a:ext cx="2654399" cy="486000"/>
           </a:xfrm>
           <a:prstGeom prst="rect">
@@ -3333,7 +3333,7 @@
         </p:nvCxnSpPr>
         <p:spPr>
           <a:xfrm>
-            <a:off x="6385199" y="3209399"/>
+            <a:off x="6385199" y="3994199"/>
             <a:ext cx="198000" cy="0"/>
           </a:xfrm>
           <a:prstGeom prst="line">
@@ -3369,7 +3369,7 @@
         </p:nvSpPr>
         <p:spPr>
           <a:xfrm>
-            <a:off x="6619199" y="2966399"/>
+            <a:off x="6619199" y="3751199"/>
             <a:ext cx="2654399" cy="486000"/>
           </a:xfrm>
           <a:prstGeom prst="rect">
@@ -3454,7 +3454,7 @@
         </p:nvSpPr>
         <p:spPr>
           <a:xfrm>
-            <a:off x="644400" y="3718799"/>
+            <a:off x="644400" y="4503599"/>
             <a:ext cx="54000" cy="180000"/>
           </a:xfrm>
           <a:prstGeom prst="rect">
@@ -3498,7 +3498,7 @@
         </p:nvSpPr>
         <p:spPr>
           <a:xfrm>
-            <a:off x="770400" y="3668399"/>
+            <a:off x="770400" y="4453199"/>
             <a:ext cx="8503200" cy="288000"/>
           </a:xfrm>
           <a:prstGeom prst="rect">
@@ -3542,7 +3542,7 @@
         </p:nvSpPr>
         <p:spPr>
           <a:xfrm>
-            <a:off x="770400" y="3974399"/>
+            <a:off x="770400" y="4759199"/>
             <a:ext cx="1655999" cy="259200"/>
           </a:xfrm>
           <a:prstGeom prst="rect">
@@ -3586,7 +3586,7 @@
         </p:nvSpPr>
         <p:spPr>
           <a:xfrm>
-            <a:off x="2426400" y="3974399"/>
+            <a:off x="2426400" y="4759199"/>
             <a:ext cx="6847199" cy="259200"/>
           </a:xfrm>
           <a:prstGeom prst="rect">
@@ -3630,7 +3630,7 @@
         </p:nvSpPr>
         <p:spPr>
           <a:xfrm>
-            <a:off x="770400" y="4233599"/>
+            <a:off x="770400" y="5018399"/>
             <a:ext cx="1655999" cy="259200"/>
           </a:xfrm>
           <a:prstGeom prst="rect">
@@ -3674,7 +3674,7 @@
         </p:nvSpPr>
         <p:spPr>
           <a:xfrm>
-            <a:off x="2426400" y="4233599"/>
+            <a:off x="2426400" y="5018399"/>
             <a:ext cx="6847199" cy="259200"/>
           </a:xfrm>
           <a:prstGeom prst="rect">
@@ -3718,7 +3718,7 @@
         </p:nvSpPr>
         <p:spPr>
           <a:xfrm>
-            <a:off x="770400" y="4492799"/>
+            <a:off x="770400" y="5277599"/>
             <a:ext cx="1655999" cy="259200"/>
           </a:xfrm>
           <a:prstGeom prst="rect">
@@ -3762,7 +3762,7 @@
         </p:nvSpPr>
         <p:spPr>
           <a:xfrm>
-            <a:off x="2426400" y="4492799"/>
+            <a:off x="2426400" y="5277599"/>
             <a:ext cx="6847199" cy="259200"/>
           </a:xfrm>
           <a:prstGeom prst="rect">
@@ -3952,7 +3952,7 @@
         </p:nvSpPr>
         <p:spPr>
           <a:xfrm>
-            <a:off x="644400" y="1670400"/>
+            <a:off x="644400" y="2413800"/>
             <a:ext cx="54000" cy="180000"/>
           </a:xfrm>
           <a:prstGeom prst="rect">
@@ -3996,7 +3996,7 @@
         </p:nvSpPr>
         <p:spPr>
           <a:xfrm>
-            <a:off x="770400" y="1620000"/>
+            <a:off x="770400" y="2363400"/>
             <a:ext cx="8503200" cy="288000"/>
           </a:xfrm>
           <a:prstGeom prst="rect">
@@ -4040,7 +4040,7 @@
         </p:nvSpPr>
         <p:spPr>
           <a:xfrm>
-            <a:off x="770400" y="1961999"/>
+            <a:off x="770400" y="2705399"/>
             <a:ext cx="1882799" cy="827999"/>
           </a:xfrm>
           <a:prstGeom prst="rect">
@@ -4146,7 +4146,7 @@
         </p:nvSpPr>
         <p:spPr>
           <a:xfrm>
-            <a:off x="2653199" y="2196000"/>
+            <a:off x="2653199" y="2939400"/>
             <a:ext cx="324000" cy="360000"/>
           </a:xfrm>
           <a:prstGeom prst="rect">
@@ -4190,7 +4190,7 @@
         </p:nvSpPr>
         <p:spPr>
           <a:xfrm>
-            <a:off x="2977200" y="1961999"/>
+            <a:off x="2977200" y="2705399"/>
             <a:ext cx="1882799" cy="827999"/>
           </a:xfrm>
           <a:prstGeom prst="rect">
@@ -4296,7 +4296,7 @@
         </p:nvSpPr>
         <p:spPr>
           <a:xfrm>
-            <a:off x="4860000" y="2196000"/>
+            <a:off x="4860000" y="2939400"/>
             <a:ext cx="324000" cy="360000"/>
           </a:xfrm>
           <a:prstGeom prst="rect">
@@ -4340,7 +4340,7 @@
         </p:nvSpPr>
         <p:spPr>
           <a:xfrm>
-            <a:off x="5184000" y="1961999"/>
+            <a:off x="5184000" y="2705399"/>
             <a:ext cx="1882799" cy="827999"/>
           </a:xfrm>
           <a:prstGeom prst="rect">
@@ -4446,7 +4446,7 @@
         </p:nvSpPr>
         <p:spPr>
           <a:xfrm>
-            <a:off x="7066800" y="2196000"/>
+            <a:off x="7066800" y="2939400"/>
             <a:ext cx="324000" cy="360000"/>
           </a:xfrm>
           <a:prstGeom prst="rect">
@@ -4490,7 +4490,7 @@
         </p:nvSpPr>
         <p:spPr>
           <a:xfrm>
-            <a:off x="7390800" y="1961999"/>
+            <a:off x="7390800" y="2705399"/>
             <a:ext cx="1882799" cy="827999"/>
           </a:xfrm>
           <a:prstGeom prst="rect">
@@ -4575,7 +4575,7 @@
         </p:nvSpPr>
         <p:spPr>
           <a:xfrm>
-            <a:off x="644400" y="3056400"/>
+            <a:off x="644400" y="3799800"/>
             <a:ext cx="54000" cy="180000"/>
           </a:xfrm>
           <a:prstGeom prst="rect">
@@ -4619,7 +4619,7 @@
         </p:nvSpPr>
         <p:spPr>
           <a:xfrm>
-            <a:off x="770400" y="3006000"/>
+            <a:off x="770400" y="3749400"/>
             <a:ext cx="8503200" cy="288000"/>
           </a:xfrm>
           <a:prstGeom prst="rect">
@@ -4663,7 +4663,7 @@
         </p:nvSpPr>
         <p:spPr>
           <a:xfrm>
-            <a:off x="770400" y="3311999"/>
+            <a:off x="770400" y="4055399"/>
             <a:ext cx="1655999" cy="259200"/>
           </a:xfrm>
           <a:prstGeom prst="rect">
@@ -4707,7 +4707,7 @@
         </p:nvSpPr>
         <p:spPr>
           <a:xfrm>
-            <a:off x="2426400" y="3311999"/>
+            <a:off x="2426400" y="4055399"/>
             <a:ext cx="6847199" cy="259200"/>
           </a:xfrm>
           <a:prstGeom prst="rect">
@@ -4751,7 +4751,7 @@
         </p:nvSpPr>
         <p:spPr>
           <a:xfrm>
-            <a:off x="770400" y="3571200"/>
+            <a:off x="770400" y="4314600"/>
             <a:ext cx="1655999" cy="259200"/>
           </a:xfrm>
           <a:prstGeom prst="rect">
@@ -4795,7 +4795,7 @@
         </p:nvSpPr>
         <p:spPr>
           <a:xfrm>
-            <a:off x="2426400" y="3571200"/>
+            <a:off x="2426400" y="4314600"/>
             <a:ext cx="6847199" cy="259200"/>
           </a:xfrm>
           <a:prstGeom prst="rect">
@@ -4839,7 +4839,7 @@
         </p:nvSpPr>
         <p:spPr>
           <a:xfrm>
-            <a:off x="770400" y="3830399"/>
+            <a:off x="770400" y="4573799"/>
             <a:ext cx="1655999" cy="259200"/>
           </a:xfrm>
           <a:prstGeom prst="rect">
@@ -4883,7 +4883,7 @@
         </p:nvSpPr>
         <p:spPr>
           <a:xfrm>
-            <a:off x="2426400" y="3830399"/>
+            <a:off x="2426400" y="4573799"/>
             <a:ext cx="6847199" cy="259200"/>
           </a:xfrm>
           <a:prstGeom prst="rect">
@@ -4927,7 +4927,7 @@
         </p:nvSpPr>
         <p:spPr>
           <a:xfrm>
-            <a:off x="770400" y="4089600"/>
+            <a:off x="770400" y="4833000"/>
             <a:ext cx="1655999" cy="259200"/>
           </a:xfrm>
           <a:prstGeom prst="rect">
@@ -4971,7 +4971,7 @@
         </p:nvSpPr>
         <p:spPr>
           <a:xfrm>
-            <a:off x="2426400" y="4089600"/>
+            <a:off x="2426400" y="4833000"/>
             <a:ext cx="6847199" cy="259200"/>
           </a:xfrm>
           <a:prstGeom prst="rect">
@@ -5015,7 +5015,7 @@
         </p:nvSpPr>
         <p:spPr>
           <a:xfrm>
-            <a:off x="644400" y="4474799"/>
+            <a:off x="644400" y="5218199"/>
             <a:ext cx="8629200" cy="360000"/>
           </a:xfrm>
           <a:prstGeom prst="rect">
@@ -5226,7 +5226,7 @@
         </p:nvSpPr>
         <p:spPr>
           <a:xfrm>
-            <a:off x="644400" y="1670400"/>
+            <a:off x="644400" y="3042000"/>
             <a:ext cx="54000" cy="180000"/>
           </a:xfrm>
           <a:prstGeom prst="rect">
@@ -5270,7 +5270,7 @@
         </p:nvSpPr>
         <p:spPr>
           <a:xfrm>
-            <a:off x="770400" y="1620000"/>
+            <a:off x="770400" y="2991600"/>
             <a:ext cx="8503200" cy="288000"/>
           </a:xfrm>
           <a:prstGeom prst="rect">
@@ -5314,7 +5314,7 @@
         </p:nvSpPr>
         <p:spPr>
           <a:xfrm>
-            <a:off x="770400" y="1961999"/>
+            <a:off x="770400" y="3333599"/>
             <a:ext cx="1963799" cy="576000"/>
           </a:xfrm>
           <a:prstGeom prst="rect">
@@ -5378,7 +5378,7 @@
         </p:nvCxnSpPr>
         <p:spPr>
           <a:xfrm>
-            <a:off x="2770199" y="2249999"/>
+            <a:off x="2770199" y="3621599"/>
             <a:ext cx="144000" cy="0"/>
           </a:xfrm>
           <a:prstGeom prst="line">
@@ -5414,7 +5414,7 @@
         </p:nvSpPr>
         <p:spPr>
           <a:xfrm>
-            <a:off x="2950199" y="1961999"/>
+            <a:off x="2950199" y="3333599"/>
             <a:ext cx="1963799" cy="576000"/>
           </a:xfrm>
           <a:prstGeom prst="rect">
@@ -5499,7 +5499,7 @@
         </p:nvCxnSpPr>
         <p:spPr>
           <a:xfrm>
-            <a:off x="4949999" y="2249999"/>
+            <a:off x="4949999" y="3621599"/>
             <a:ext cx="144000" cy="0"/>
           </a:xfrm>
           <a:prstGeom prst="line">
@@ -5535,7 +5535,7 @@
         </p:nvSpPr>
         <p:spPr>
           <a:xfrm>
-            <a:off x="5129999" y="1961999"/>
+            <a:off x="5129999" y="3333599"/>
             <a:ext cx="1963799" cy="576000"/>
           </a:xfrm>
           <a:prstGeom prst="rect">
@@ -5620,7 +5620,7 @@
         </p:nvCxnSpPr>
         <p:spPr>
           <a:xfrm>
-            <a:off x="7129800" y="2249999"/>
+            <a:off x="7129800" y="3621599"/>
             <a:ext cx="143999" cy="0"/>
           </a:xfrm>
           <a:prstGeom prst="line">
@@ -5656,7 +5656,7 @@
         </p:nvSpPr>
         <p:spPr>
           <a:xfrm>
-            <a:off x="7309799" y="1961999"/>
+            <a:off x="7309799" y="3333599"/>
             <a:ext cx="1963799" cy="576000"/>
           </a:xfrm>
           <a:prstGeom prst="rect">
@@ -5741,7 +5741,7 @@
         </p:nvSpPr>
         <p:spPr>
           <a:xfrm>
-            <a:off x="644400" y="2804399"/>
+            <a:off x="644400" y="4175999"/>
             <a:ext cx="54000" cy="180000"/>
           </a:xfrm>
           <a:prstGeom prst="rect">
@@ -5785,7 +5785,7 @@
         </p:nvSpPr>
         <p:spPr>
           <a:xfrm>
-            <a:off x="770400" y="2753999"/>
+            <a:off x="770400" y="4125599"/>
             <a:ext cx="8503200" cy="288000"/>
           </a:xfrm>
           <a:prstGeom prst="rect">
@@ -5829,7 +5829,7 @@
         </p:nvSpPr>
         <p:spPr>
           <a:xfrm>
-            <a:off x="770400" y="3059999"/>
+            <a:off x="770400" y="4431599"/>
             <a:ext cx="1655999" cy="259200"/>
           </a:xfrm>
           <a:prstGeom prst="rect">
@@ -5873,7 +5873,7 @@
         </p:nvSpPr>
         <p:spPr>
           <a:xfrm>
-            <a:off x="2426400" y="3059999"/>
+            <a:off x="2426400" y="4431599"/>
             <a:ext cx="6847199" cy="259200"/>
           </a:xfrm>
           <a:prstGeom prst="rect">
@@ -5917,7 +5917,7 @@
         </p:nvSpPr>
         <p:spPr>
           <a:xfrm>
-            <a:off x="770400" y="3319199"/>
+            <a:off x="770400" y="4690799"/>
             <a:ext cx="1655999" cy="259200"/>
           </a:xfrm>
           <a:prstGeom prst="rect">
@@ -5961,7 +5961,7 @@
         </p:nvSpPr>
         <p:spPr>
           <a:xfrm>
-            <a:off x="2426400" y="3319199"/>
+            <a:off x="2426400" y="4690799"/>
             <a:ext cx="6847199" cy="259200"/>
           </a:xfrm>
           <a:prstGeom prst="rect">
@@ -6151,7 +6151,7 @@
         </p:nvSpPr>
         <p:spPr>
           <a:xfrm>
-            <a:off x="644400" y="1670400"/>
+            <a:off x="644400" y="2547000"/>
             <a:ext cx="54000" cy="180000"/>
           </a:xfrm>
           <a:prstGeom prst="rect">
@@ -6195,7 +6195,7 @@
         </p:nvSpPr>
         <p:spPr>
           <a:xfrm>
-            <a:off x="770400" y="1620000"/>
+            <a:off x="770400" y="2496600"/>
             <a:ext cx="8503200" cy="288000"/>
           </a:xfrm>
           <a:prstGeom prst="rect">
@@ -6239,7 +6239,7 @@
         </p:nvSpPr>
         <p:spPr>
           <a:xfrm>
-            <a:off x="770400" y="1961999"/>
+            <a:off x="770400" y="2838599"/>
             <a:ext cx="1963799" cy="540000"/>
           </a:xfrm>
           <a:prstGeom prst="rect">
@@ -6303,7 +6303,7 @@
         </p:nvCxnSpPr>
         <p:spPr>
           <a:xfrm>
-            <a:off x="2770199" y="2231999"/>
+            <a:off x="2770199" y="3108599"/>
             <a:ext cx="144000" cy="0"/>
           </a:xfrm>
           <a:prstGeom prst="line">
@@ -6339,7 +6339,7 @@
         </p:nvSpPr>
         <p:spPr>
           <a:xfrm>
-            <a:off x="2950199" y="1961999"/>
+            <a:off x="2950199" y="2838599"/>
             <a:ext cx="1963799" cy="540000"/>
           </a:xfrm>
           <a:prstGeom prst="rect">
@@ -6424,7 +6424,7 @@
         </p:nvCxnSpPr>
         <p:spPr>
           <a:xfrm>
-            <a:off x="4949999" y="2231999"/>
+            <a:off x="4949999" y="3108599"/>
             <a:ext cx="144000" cy="0"/>
           </a:xfrm>
           <a:prstGeom prst="line">
@@ -6460,7 +6460,7 @@
         </p:nvSpPr>
         <p:spPr>
           <a:xfrm>
-            <a:off x="5129999" y="1961999"/>
+            <a:off x="5129999" y="2838599"/>
             <a:ext cx="1963799" cy="540000"/>
           </a:xfrm>
           <a:prstGeom prst="rect">
@@ -6545,7 +6545,7 @@
         </p:nvCxnSpPr>
         <p:spPr>
           <a:xfrm>
-            <a:off x="7129800" y="2231999"/>
+            <a:off x="7129800" y="3108599"/>
             <a:ext cx="143999" cy="0"/>
           </a:xfrm>
           <a:prstGeom prst="line">
@@ -6581,7 +6581,7 @@
         </p:nvSpPr>
         <p:spPr>
           <a:xfrm>
-            <a:off x="7309799" y="1961999"/>
+            <a:off x="7309799" y="2838599"/>
             <a:ext cx="1963799" cy="540000"/>
           </a:xfrm>
           <a:prstGeom prst="rect">
@@ -6645,7 +6645,7 @@
         </p:nvSpPr>
         <p:spPr>
           <a:xfrm>
-            <a:off x="644400" y="2732399"/>
+            <a:off x="644400" y="3608999"/>
             <a:ext cx="54000" cy="180000"/>
           </a:xfrm>
           <a:prstGeom prst="rect">
@@ -6689,7 +6689,7 @@
         </p:nvSpPr>
         <p:spPr>
           <a:xfrm>
-            <a:off x="770400" y="2681999"/>
+            <a:off x="770400" y="3558599"/>
             <a:ext cx="8503200" cy="288000"/>
           </a:xfrm>
           <a:prstGeom prst="rect">
@@ -6733,7 +6733,7 @@
         </p:nvSpPr>
         <p:spPr>
           <a:xfrm>
-            <a:off x="770400" y="3023999"/>
+            <a:off x="770400" y="3900599"/>
             <a:ext cx="1963799" cy="540000"/>
           </a:xfrm>
           <a:prstGeom prst="rect">
@@ -6797,7 +6797,7 @@
         </p:nvCxnSpPr>
         <p:spPr>
           <a:xfrm>
-            <a:off x="2770199" y="3293999"/>
+            <a:off x="2770199" y="4170599"/>
             <a:ext cx="144000" cy="0"/>
           </a:xfrm>
           <a:prstGeom prst="line">
@@ -6833,7 +6833,7 @@
         </p:nvSpPr>
         <p:spPr>
           <a:xfrm>
-            <a:off x="2950199" y="3023999"/>
+            <a:off x="2950199" y="3900599"/>
             <a:ext cx="1963799" cy="540000"/>
           </a:xfrm>
           <a:prstGeom prst="rect">
@@ -6918,7 +6918,7 @@
         </p:nvCxnSpPr>
         <p:spPr>
           <a:xfrm>
-            <a:off x="4949999" y="3293999"/>
+            <a:off x="4949999" y="4170599"/>
             <a:ext cx="144000" cy="0"/>
           </a:xfrm>
           <a:prstGeom prst="line">
@@ -6954,7 +6954,7 @@
         </p:nvSpPr>
         <p:spPr>
           <a:xfrm>
-            <a:off x="5129999" y="3023999"/>
+            <a:off x="5129999" y="3900599"/>
             <a:ext cx="1963799" cy="540000"/>
           </a:xfrm>
           <a:prstGeom prst="rect">
@@ -7039,7 +7039,7 @@
         </p:nvCxnSpPr>
         <p:spPr>
           <a:xfrm>
-            <a:off x="7129800" y="3293999"/>
+            <a:off x="7129800" y="4170599"/>
             <a:ext cx="143999" cy="0"/>
           </a:xfrm>
           <a:prstGeom prst="line">
@@ -7075,7 +7075,7 @@
         </p:nvSpPr>
         <p:spPr>
           <a:xfrm>
-            <a:off x="7309799" y="3023999"/>
+            <a:off x="7309799" y="3900599"/>
             <a:ext cx="1963799" cy="540000"/>
           </a:xfrm>
           <a:prstGeom prst="rect">
@@ -7139,7 +7139,7 @@
         </p:nvSpPr>
         <p:spPr>
           <a:xfrm>
-            <a:off x="644400" y="3794399"/>
+            <a:off x="644400" y="4670999"/>
             <a:ext cx="54000" cy="180000"/>
           </a:xfrm>
           <a:prstGeom prst="rect">
@@ -7183,7 +7183,7 @@
         </p:nvSpPr>
         <p:spPr>
           <a:xfrm>
-            <a:off x="770400" y="3743999"/>
+            <a:off x="770400" y="4620599"/>
             <a:ext cx="8503200" cy="288000"/>
           </a:xfrm>
           <a:prstGeom prst="rect">
@@ -7227,7 +7227,7 @@
         </p:nvSpPr>
         <p:spPr>
           <a:xfrm>
-            <a:off x="770400" y="4049999"/>
+            <a:off x="770400" y="4926599"/>
             <a:ext cx="1655999" cy="259200"/>
           </a:xfrm>
           <a:prstGeom prst="rect">
@@ -7271,7 +7271,7 @@
         </p:nvSpPr>
         <p:spPr>
           <a:xfrm>
-            <a:off x="2426400" y="4049999"/>
+            <a:off x="2426400" y="4926599"/>
             <a:ext cx="6847199" cy="259200"/>
           </a:xfrm>
           <a:prstGeom prst="rect">
@@ -7315,7 +7315,7 @@
         </p:nvSpPr>
         <p:spPr>
           <a:xfrm>
-            <a:off x="770400" y="4309200"/>
+            <a:off x="770400" y="5185800"/>
             <a:ext cx="1655999" cy="259200"/>
           </a:xfrm>
           <a:prstGeom prst="rect">
@@ -7359,7 +7359,7 @@
         </p:nvSpPr>
         <p:spPr>
           <a:xfrm>
-            <a:off x="2426400" y="4309200"/>
+            <a:off x="2426400" y="5185800"/>
             <a:ext cx="6847199" cy="259200"/>
           </a:xfrm>
           <a:prstGeom prst="rect">
